--- a/docs/presentation/v7/going-v7-class-presentation.pptx
+++ b/docs/presentation/v7/going-v7-class-presentation.pptx
@@ -622,2667 +622,2667 @@
 </file>
 
 <file path=ppt/notesSlides/notesSlide1.xml><?xml version="1.0" encoding="utf-8"?>
-<p:notes xmlns:a="http://schemas.openxmlformats.org/drawingml/2006/main" xmlns:r="http://schemas.openxmlformats.org/officeDocument/2006/relationships" xmlns:p="http://schemas.openxmlformats.org/presentationml/2006/main" xmlns:m="http://schemas.openxmlformats.org/officeDocument/2006/math" xmlns:a14="http://schemas.microsoft.com/office/drawing/2010/main" showMasterSp="1" showMasterPhAnim="1">
-  <p:cSld>
-    <p:spTree>
-      <p:nvGrpSpPr>
-        <p:cNvPr id="1" name=""/>
-        <p:cNvGrpSpPr/>
-        <p:nvPr/>
-      </p:nvGrpSpPr>
-      <p:grpSpPr>
-        <a:xfrm>
-          <a:off x="0" y="0"/>
-          <a:ext cx="0" cy="0"/>
-          <a:chOff x="0" y="0"/>
-          <a:chExt cx="0" cy="0"/>
-        </a:xfrm>
-      </p:grpSpPr>
-      <p:sp>
-        <p:nvSpPr>
-          <p:cNvPr id="71" name="Shape 71"/>
-          <p:cNvSpPr/>
-          <p:nvPr>
-            <p:ph type="sldImg"/>
-          </p:nvPr>
-        </p:nvSpPr>
-        <p:spPr>
-          <a:prstGeom prst="rect">
-            <a:avLst/>
-          </a:prstGeom>
-        </p:spPr>
-        <p:txBody>
-          <a:bodyPr/>
-          <a:lstStyle/>
-          <a:p>
-            <a:pPr/>
-          </a:p>
-        </p:txBody>
-      </p:sp>
-      <p:sp>
-        <p:nvSpPr>
-          <p:cNvPr id="72" name="Shape 72"/>
-          <p:cNvSpPr/>
-          <p:nvPr>
-            <p:ph type="body" sz="quarter" idx="1"/>
-          </p:nvPr>
-        </p:nvSpPr>
-        <p:spPr>
-          <a:prstGeom prst="rect">
-            <a:avLst/>
-          </a:prstGeom>
-        </p:spPr>
-        <p:txBody>
-          <a:bodyPr/>
-          <a:lstStyle/>
-          <a:p>
-            <a:pPr>
-              <a:buNone/>
-            </a:pPr>
-            <a:r>
-              <a:t>[목표 35초]</a:t>
-            </a:r>
-          </a:p>
-          <a:p>
-            <a:pPr>
-              <a:buNone/>
-            </a:pPr>
-            <a:r>
-              <a:t/>
-            </a:r>
-          </a:p>
-          <a:p>
-            <a:pPr>
-              <a:buNone/>
-            </a:pPr>
-            <a:r>
-              <a:t>안녕하세요. 제가 만든 여행 서비스, 고잉을 소개하겠습니다.</a:t>
-            </a:r>
-          </a:p>
-          <a:p>
-            <a:pPr>
-              <a:buNone/>
-            </a:pPr>
-            <a:r>
-              <a:t/>
-            </a:r>
-          </a:p>
-          <a:p>
-            <a:pPr>
-              <a:buNone/>
-            </a:pPr>
-            <a:r>
-              <a:t>저는 여행하는 것도 좋아하고 새로운 음식점을 찾아다니는 것도 좋아합니다. 그런데 여행을 갈 때마다 식당을 검색하고, 리뷰를 읽고, 숙소에서 얼마나 먼지 비교하는 과정이 꽤 번거로웠습니다. 예약을 해 놓고도 시간을 확인하려고 메일함을 다시 찾아야 했고요.</a:t>
-            </a:r>
-          </a:p>
-          <a:p>
-            <a:pPr>
-              <a:buNone/>
-            </a:pPr>
-            <a:r>
-              <a:t/>
-            </a:r>
-          </a:p>
-          <a:p>
-            <a:pPr>
-              <a:buNone/>
-            </a:pPr>
-            <a:r>
-              <a:t>그래서 제가 여행을 준비할 때 직접 쓰고 싶은 서비스를 만들어 봤습니다. 오늘은 어떤 불편함에서 시작했고, 그걸 어떤 기능으로 해결하려 했는지 보여드리겠습니다.</a:t>
-            </a:r>
-          </a:p>
-          <a:p>
-            <a:pPr>
-              <a:buNone/>
-            </a:pPr>
-            <a:r>
-              <a:t/>
-            </a:r>
-          </a:p>
-          <a:p>
-            <a:pPr>
-              <a:buNone/>
-            </a:pPr>
-            <a:r>
-              <a:t>화면 안내: 제목을 보여주며 개인적인 계기부터 말합니다.</a:t>
-            </a:r>
-          </a:p>
-          <a:p>
-            <a:pPr>
-              <a:buNone/>
-            </a:pPr>
-            <a:r>
-              <a:t/>
-            </a:r>
-          </a:p>
-          <a:p>
-            <a:pPr>
-              <a:buNone/>
-            </a:pPr>
-            <a:r>
-              <a:t>[자료 출처 / 낭독하지 않음]</a:t>
-            </a:r>
-          </a:p>
-          <a:p>
-            <a:pPr>
-              <a:buNone/>
-            </a:pPr>
-            <a:r>
-              <a:t>https://github.com/Jin-s-work/Travel-Agent</a:t>
-            </a:r>
-          </a:p>
-          <a:p>
-            <a:pPr>
-              <a:buNone/>
-            </a:pPr>
-            <a:r>
-              <a:t>최신 화면: docs/screenshots/*-v7.jpg, 2026-10-08 운영 서비스의 가상 도쿄 여행</a:t>
-            </a:r>
-          </a:p>
-          <a:p>
-            <a:pPr>
-              <a:buNone/>
-            </a:pPr>
-            <a:r>
-              <a:t>이전 메일·일정·사진 예시: docs/presentation/CREDITS.md, 2026-10-07 로컬 합성 화면</a:t>
-            </a:r>
-          </a:p>
-          <a:p>
-            <a:pPr>
-              <a:buNone/>
-            </a:pPr>
-            <a:r>
-              <a:t>추천 v5: docs/service-v3/MAIN_RECOMMENDATION_UX.md 및 src/recommendations/hybrid_v5.py</a:t>
-            </a:r>
-          </a:p>
-          <a:p>
-            <a:pPr>
-              <a:buNone/>
-            </a:pPr>
-            <a:r>
-              <a:t>기존 v4 합성 평가: docs/service-v4/reports/hybrid-v4-benchmark.md. v5 결과가 아님.</a:t>
-            </a:r>
-          </a:p>
-          <a:p>
-            <a:pPr>
-              <a:buNone/>
-            </a:pPr>
-            <a:r>
-              <a:t>엄격 현지어 리뷰 추천 OFF. 실제 사용자 만족도 미측정. 100개 도시 입력과 자료 수준은 다름.</a:t>
-            </a:r>
-          </a:p>
-          <a:p>
-            <a:pPr>
-              <a:buNone/>
-            </a:pPr>
-            <a:r>
-              <a:t>사진: Javier Lastras, CC BY 2.0 https://commons.wikimedia.org/wiki/File:Barra_de_Casa_Lucio_(4245090907).jpg</a:t>
-            </a:r>
-          </a:p>
-          <a:p>
-            <a:pPr>
-              <a:buNone/>
-            </a:pPr>
-            <a:r>
-              <a:t>사진: Tamorlan, CC BY-SA 3.0 https://commons.wikimedia.org/wiki/File:Gallina_en_Pepitoria_(Ciriaco).JPG</a:t>
-            </a:r>
-          </a:p>
-          <a:p>
-            <a:pPr>
-              <a:buNone/>
-            </a:pPr>
-            <a:r>
-              <a:t>장소 데이터: OpenStreetMap 기여자 https://www.openstreetmap.org/copyright, Photon https://photon.komoot.io/, GeoNames https://www.geonames.org/</a:t>
-            </a:r>
-          </a:p>
-          <a:p>
-            <a:pPr>
-              <a:buNone/>
-            </a:pPr>
-            <a:r>
-              <a:t>영상은 실제 캡처의 편집본으로 처리 시간이나 클릭을 재현하지 않음.</a:t>
-            </a:r>
-          </a:p>
-        </p:txBody>
-      </p:sp>
-    </p:spTree>
-  </p:cSld>
-  <p:clrMapOvr>
-    <a:masterClrMapping/>
-  </p:clrMapOvr>
-</p:notes>
+<ns0:notes xmlns:ns0="http://schemas.openxmlformats.org/presentationml/2006/main" xmlns:ns1="http://schemas.openxmlformats.org/drawingml/2006/main" showMasterSp="1" showMasterPhAnim="1">
+  <ns0:cSld>
+    <ns0:spTree>
+      <ns0:nvGrpSpPr>
+        <ns0:cNvPr id="1" name=""/>
+        <ns0:cNvGrpSpPr/>
+        <ns0:nvPr/>
+      </ns0:nvGrpSpPr>
+      <ns0:grpSpPr>
+        <ns1:xfrm>
+          <ns1:off x="0" y="0"/>
+          <ns1:ext cx="0" cy="0"/>
+          <ns1:chOff x="0" y="0"/>
+          <ns1:chExt cx="0" cy="0"/>
+        </ns1:xfrm>
+      </ns0:grpSpPr>
+      <ns0:sp>
+        <ns0:nvSpPr>
+          <ns0:cNvPr id="71" name="Shape 71"/>
+          <ns0:cNvSpPr/>
+          <ns0:nvPr>
+            <ns0:ph type="sldImg"/>
+          </ns0:nvPr>
+        </ns0:nvSpPr>
+        <ns0:spPr>
+          <ns1:prstGeom prst="rect">
+            <ns1:avLst/>
+          </ns1:prstGeom>
+        </ns0:spPr>
+        <ns0:txBody>
+          <ns1:bodyPr/>
+          <ns1:lstStyle/>
+          <ns1:p>
+            <ns1:pPr/>
+          </ns1:p>
+        </ns0:txBody>
+      </ns0:sp>
+      <ns0:sp>
+        <ns0:nvSpPr>
+          <ns0:cNvPr id="72" name="Shape 72"/>
+          <ns0:cNvSpPr/>
+          <ns0:nvPr>
+            <ns0:ph type="body" sz="quarter" idx="1"/>
+          </ns0:nvPr>
+        </ns0:nvSpPr>
+        <ns0:spPr>
+          <ns1:prstGeom prst="rect">
+            <ns1:avLst/>
+          </ns1:prstGeom>
+        </ns0:spPr>
+        <ns0:txBody>
+          <ns1:bodyPr/>
+          <ns1:lstStyle/>
+          <ns1:p>
+            <ns1:pPr>
+              <ns1:buNone/>
+            </ns1:pPr>
+            <ns1:r>
+              <ns1:t/>
+            </ns1:r>
+          </ns1:p>
+          <ns1:p>
+            <ns1:pPr>
+              <ns1:buNone/>
+            </ns1:pPr>
+            <ns1:r>
+              <ns1:t/>
+            </ns1:r>
+          </ns1:p>
+          <ns1:p>
+            <ns1:pPr>
+              <ns1:buNone/>
+            </ns1:pPr>
+            <ns1:r>
+              <ns1:t/>
+            </ns1:r>
+          </ns1:p>
+          <ns1:p>
+            <ns1:pPr>
+              <ns1:buNone/>
+            </ns1:pPr>
+            <ns1:r>
+              <ns1:t/>
+            </ns1:r>
+          </ns1:p>
+          <ns1:p>
+            <ns1:pPr>
+              <ns1:buNone/>
+            </ns1:pPr>
+            <ns1:r>
+              <ns1:t/>
+            </ns1:r>
+          </ns1:p>
+          <ns1:p>
+            <ns1:pPr>
+              <ns1:buNone/>
+            </ns1:pPr>
+            <ns1:r>
+              <ns1:t/>
+            </ns1:r>
+          </ns1:p>
+          <ns1:p>
+            <ns1:pPr>
+              <ns1:buNone/>
+            </ns1:pPr>
+            <ns1:r>
+              <ns1:t/>
+            </ns1:r>
+          </ns1:p>
+          <ns1:p>
+            <ns1:pPr>
+              <ns1:buNone/>
+            </ns1:pPr>
+            <ns1:r>
+              <ns1:t/>
+            </ns1:r>
+          </ns1:p>
+          <ns1:p>
+            <ns1:pPr>
+              <ns1:buNone/>
+            </ns1:pPr>
+            <ns1:r>
+              <ns1:t/>
+            </ns1:r>
+          </ns1:p>
+          <ns1:p>
+            <ns1:pPr>
+              <ns1:buNone/>
+            </ns1:pPr>
+            <ns1:r>
+              <ns1:t/>
+            </ns1:r>
+          </ns1:p>
+          <ns1:p>
+            <ns1:pPr>
+              <ns1:buNone/>
+            </ns1:pPr>
+            <ns1:r>
+              <ns1:t/>
+            </ns1:r>
+          </ns1:p>
+          <ns1:p>
+            <ns1:pPr>
+              <ns1:buNone/>
+            </ns1:pPr>
+            <ns1:r>
+              <ns1:t/>
+            </ns1:r>
+          </ns1:p>
+          <ns1:p>
+            <ns1:pPr>
+              <ns1:buNone/>
+            </ns1:pPr>
+            <ns1:r>
+              <ns1:t/>
+            </ns1:r>
+          </ns1:p>
+          <ns1:p>
+            <ns1:pPr>
+              <ns1:buNone/>
+            </ns1:pPr>
+            <ns1:r>
+              <ns1:t/>
+            </ns1:r>
+          </ns1:p>
+          <ns1:p>
+            <ns1:pPr>
+              <ns1:buNone/>
+            </ns1:pPr>
+            <ns1:r>
+              <ns1:t/>
+            </ns1:r>
+          </ns1:p>
+          <ns1:p>
+            <ns1:pPr>
+              <ns1:buNone/>
+            </ns1:pPr>
+            <ns1:r>
+              <ns1:t/>
+            </ns1:r>
+          </ns1:p>
+          <ns1:p>
+            <ns1:pPr>
+              <ns1:buNone/>
+            </ns1:pPr>
+            <ns1:r>
+              <ns1:t/>
+            </ns1:r>
+          </ns1:p>
+          <ns1:p>
+            <ns1:pPr>
+              <ns1:buNone/>
+            </ns1:pPr>
+            <ns1:r>
+              <ns1:t/>
+            </ns1:r>
+          </ns1:p>
+          <ns1:p>
+            <ns1:pPr>
+              <ns1:buNone/>
+            </ns1:pPr>
+            <ns1:r>
+              <ns1:t/>
+            </ns1:r>
+          </ns1:p>
+          <ns1:p>
+            <ns1:pPr>
+              <ns1:buNone/>
+            </ns1:pPr>
+            <ns1:r>
+              <ns1:t/>
+            </ns1:r>
+          </ns1:p>
+          <ns1:p>
+            <ns1:pPr>
+              <ns1:buNone/>
+            </ns1:pPr>
+            <ns1:r>
+              <ns1:t/>
+            </ns1:r>
+          </ns1:p>
+        </ns0:txBody>
+      </ns0:sp>
+    </ns0:spTree>
+  </ns0:cSld>
+  <ns0:clrMapOvr>
+    <ns1:masterClrMapping/>
+  </ns0:clrMapOvr>
+</ns0:notes>
 </file>
 
 <file path=ppt/notesSlides/notesSlide10.xml><?xml version="1.0" encoding="utf-8"?>
-<p:notes xmlns:a="http://schemas.openxmlformats.org/drawingml/2006/main" xmlns:r="http://schemas.openxmlformats.org/officeDocument/2006/relationships" xmlns:p="http://schemas.openxmlformats.org/presentationml/2006/main" xmlns:m="http://schemas.openxmlformats.org/officeDocument/2006/math" xmlns:a14="http://schemas.microsoft.com/office/drawing/2010/main" showMasterSp="1" showMasterPhAnim="1">
-  <p:cSld>
-    <p:spTree>
-      <p:nvGrpSpPr>
-        <p:cNvPr id="1" name=""/>
-        <p:cNvGrpSpPr/>
-        <p:nvPr/>
-      </p:nvGrpSpPr>
-      <p:grpSpPr>
-        <a:xfrm>
-          <a:off x="0" y="0"/>
-          <a:ext cx="0" cy="0"/>
-          <a:chOff x="0" y="0"/>
-          <a:chExt cx="0" cy="0"/>
-        </a:xfrm>
-      </p:grpSpPr>
-      <p:sp>
-        <p:nvSpPr>
-          <p:cNvPr id="186" name="Shape 186"/>
-          <p:cNvSpPr/>
-          <p:nvPr>
-            <p:ph type="sldImg"/>
-          </p:nvPr>
-        </p:nvSpPr>
-        <p:spPr>
-          <a:prstGeom prst="rect">
-            <a:avLst/>
-          </a:prstGeom>
-        </p:spPr>
-        <p:txBody>
-          <a:bodyPr/>
-          <a:lstStyle/>
-          <a:p>
-            <a:pPr/>
-          </a:p>
-        </p:txBody>
-      </p:sp>
-      <p:sp>
-        <p:nvSpPr>
-          <p:cNvPr id="187" name="Shape 187"/>
-          <p:cNvSpPr/>
-          <p:nvPr>
-            <p:ph type="body" sz="quarter" idx="1"/>
-          </p:nvPr>
-        </p:nvSpPr>
-        <p:spPr>
-          <a:prstGeom prst="rect">
-            <a:avLst/>
-          </a:prstGeom>
-        </p:spPr>
-        <p:txBody>
-          <a:bodyPr/>
-          <a:lstStyle/>
-          <a:p>
-            <a:pPr>
-              <a:buNone/>
-            </a:pPr>
-            <a:r>
-              <a:t>[목표 40초]</a:t>
-            </a:r>
-          </a:p>
-          <a:p>
-            <a:pPr>
-              <a:buNone/>
-            </a:pPr>
-            <a:r>
-              <a:t/>
-            </a:r>
-          </a:p>
-          <a:p>
-            <a:pPr>
-              <a:buNone/>
-            </a:pPr>
-            <a:r>
-              <a:t>이번에는 메인에서 추천을 확인하고 저장한 뒤, 예약을 질문하고 출처를 여는 흐름까지 배포 화면에서 확인했습니다. 기능을 더 넣는 것만큼 기존 기능을 쉽게 쓰게 만드는 일이 중요하다는 걸 느꼈습니다.</a:t>
-            </a:r>
-          </a:p>
-          <a:p>
-            <a:pPr>
-              <a:buNone/>
-            </a:pPr>
-            <a:r>
-              <a:t/>
-            </a:r>
-          </a:p>
-          <a:p>
-            <a:pPr>
-              <a:buNone/>
-            </a:pPr>
-            <a:r>
-              <a:t>다음에는 사진과 영업 정보가 비어 있는 장소를 먼저 보강하려고 합니다. 현지어 리뷰 추천은 실제 자료의 이용 범위와 언어 판별 품질을 확인한 뒤 켤 계획입니다. 추천 평가는 제가 만든 예시를 넘어, 순위를 모르는 다른 사람이 후보를 평가하는 방식으로 진행하고 싶습니다.</a:t>
-            </a:r>
-          </a:p>
-          <a:p>
-            <a:pPr>
-              <a:buNone/>
-            </a:pPr>
-            <a:r>
-              <a:t/>
-            </a:r>
-          </a:p>
-          <a:p>
-            <a:pPr>
-              <a:buNone/>
-            </a:pPr>
-            <a:r>
-              <a:t>도시 입력은 백 개를 지원하지만 도시마다 자료 수준은 다릅니다. 실제 여행과 휴대폰에서 사용해 보면서 불편한 부분을 계속 줄여 나가겠습니다. 마지막으로 짧은 화면 영상입니다.</a:t>
-            </a:r>
-          </a:p>
-          <a:p>
-            <a:pPr>
-              <a:buNone/>
-            </a:pPr>
-            <a:r>
-              <a:t/>
-            </a:r>
-          </a:p>
-          <a:p>
-            <a:pPr>
-              <a:buNone/>
-            </a:pPr>
-            <a:r>
-              <a:t>화면 안내: 사진 확보, 리뷰 품질, 독립 평가의 순서로 설명합니다.</a:t>
-            </a:r>
-          </a:p>
-          <a:p>
-            <a:pPr>
-              <a:buNone/>
-            </a:pPr>
-            <a:r>
-              <a:t/>
-            </a:r>
-          </a:p>
-          <a:p>
-            <a:pPr>
-              <a:buNone/>
-            </a:pPr>
-            <a:r>
-              <a:t>[자료 출처 / 낭독하지 않음]</a:t>
-            </a:r>
-          </a:p>
-          <a:p>
-            <a:pPr>
-              <a:buNone/>
-            </a:pPr>
-            <a:r>
-              <a:t>https://github.com/Jin-s-work/Travel-Agent</a:t>
-            </a:r>
-          </a:p>
-          <a:p>
-            <a:pPr>
-              <a:buNone/>
-            </a:pPr>
-            <a:r>
-              <a:t>최신 화면: docs/screenshots/*-v7.jpg, 2026-10-08 운영 서비스의 가상 도쿄 여행</a:t>
-            </a:r>
-          </a:p>
-          <a:p>
-            <a:pPr>
-              <a:buNone/>
-            </a:pPr>
-            <a:r>
-              <a:t>이전 메일·일정·사진 예시: docs/presentation/CREDITS.md, 2026-10-07 로컬 합성 화면</a:t>
-            </a:r>
-          </a:p>
-          <a:p>
-            <a:pPr>
-              <a:buNone/>
-            </a:pPr>
-            <a:r>
-              <a:t>추천 v5: docs/service-v3/MAIN_RECOMMENDATION_UX.md 및 src/recommendations/hybrid_v5.py</a:t>
-            </a:r>
-          </a:p>
-          <a:p>
-            <a:pPr>
-              <a:buNone/>
-            </a:pPr>
-            <a:r>
-              <a:t>기존 v4 합성 평가: docs/service-v4/reports/hybrid-v4-benchmark.md. v5 결과가 아님.</a:t>
-            </a:r>
-          </a:p>
-          <a:p>
-            <a:pPr>
-              <a:buNone/>
-            </a:pPr>
-            <a:r>
-              <a:t>엄격 현지어 리뷰 추천 OFF. 실제 사용자 만족도 미측정. 100개 도시 입력과 자료 수준은 다름.</a:t>
-            </a:r>
-          </a:p>
-          <a:p>
-            <a:pPr>
-              <a:buNone/>
-            </a:pPr>
-            <a:r>
-              <a:t>사진: Javier Lastras, CC BY 2.0 https://commons.wikimedia.org/wiki/File:Barra_de_Casa_Lucio_(4245090907).jpg</a:t>
-            </a:r>
-          </a:p>
-          <a:p>
-            <a:pPr>
-              <a:buNone/>
-            </a:pPr>
-            <a:r>
-              <a:t>사진: Tamorlan, CC BY-SA 3.0 https://commons.wikimedia.org/wiki/File:Gallina_en_Pepitoria_(Ciriaco).JPG</a:t>
-            </a:r>
-          </a:p>
-          <a:p>
-            <a:pPr>
-              <a:buNone/>
-            </a:pPr>
-            <a:r>
-              <a:t>장소 데이터: OpenStreetMap 기여자 https://www.openstreetmap.org/copyright, Photon https://photon.komoot.io/, GeoNames https://www.geonames.org/</a:t>
-            </a:r>
-          </a:p>
-          <a:p>
-            <a:pPr>
-              <a:buNone/>
-            </a:pPr>
-            <a:r>
-              <a:t>영상은 실제 캡처의 편집본으로 처리 시간이나 클릭을 재현하지 않음.</a:t>
-            </a:r>
-          </a:p>
-        </p:txBody>
-      </p:sp>
-    </p:spTree>
-  </p:cSld>
-  <p:clrMapOvr>
-    <a:masterClrMapping/>
-  </p:clrMapOvr>
-</p:notes>
+<ns0:notes xmlns:ns0="http://schemas.openxmlformats.org/presentationml/2006/main" xmlns:ns1="http://schemas.openxmlformats.org/drawingml/2006/main" showMasterSp="1" showMasterPhAnim="1">
+  <ns0:cSld>
+    <ns0:spTree>
+      <ns0:nvGrpSpPr>
+        <ns0:cNvPr id="1" name=""/>
+        <ns0:cNvGrpSpPr/>
+        <ns0:nvPr/>
+      </ns0:nvGrpSpPr>
+      <ns0:grpSpPr>
+        <ns1:xfrm>
+          <ns1:off x="0" y="0"/>
+          <ns1:ext cx="0" cy="0"/>
+          <ns1:chOff x="0" y="0"/>
+          <ns1:chExt cx="0" cy="0"/>
+        </ns1:xfrm>
+      </ns0:grpSpPr>
+      <ns0:sp>
+        <ns0:nvSpPr>
+          <ns0:cNvPr id="186" name="Shape 186"/>
+          <ns0:cNvSpPr/>
+          <ns0:nvPr>
+            <ns0:ph type="sldImg"/>
+          </ns0:nvPr>
+        </ns0:nvSpPr>
+        <ns0:spPr>
+          <ns1:prstGeom prst="rect">
+            <ns1:avLst/>
+          </ns1:prstGeom>
+        </ns0:spPr>
+        <ns0:txBody>
+          <ns1:bodyPr/>
+          <ns1:lstStyle/>
+          <ns1:p>
+            <ns1:pPr/>
+          </ns1:p>
+        </ns0:txBody>
+      </ns0:sp>
+      <ns0:sp>
+        <ns0:nvSpPr>
+          <ns0:cNvPr id="187" name="Shape 187"/>
+          <ns0:cNvSpPr/>
+          <ns0:nvPr>
+            <ns0:ph type="body" sz="quarter" idx="1"/>
+          </ns0:nvPr>
+        </ns0:nvSpPr>
+        <ns0:spPr>
+          <ns1:prstGeom prst="rect">
+            <ns1:avLst/>
+          </ns1:prstGeom>
+        </ns0:spPr>
+        <ns0:txBody>
+          <ns1:bodyPr/>
+          <ns1:lstStyle/>
+          <ns1:p>
+            <ns1:pPr>
+              <ns1:buNone/>
+            </ns1:pPr>
+            <ns1:r>
+              <ns1:t/>
+            </ns1:r>
+          </ns1:p>
+          <ns1:p>
+            <ns1:pPr>
+              <ns1:buNone/>
+            </ns1:pPr>
+            <ns1:r>
+              <ns1:t/>
+            </ns1:r>
+          </ns1:p>
+          <ns1:p>
+            <ns1:pPr>
+              <ns1:buNone/>
+            </ns1:pPr>
+            <ns1:r>
+              <ns1:t/>
+            </ns1:r>
+          </ns1:p>
+          <ns1:p>
+            <ns1:pPr>
+              <ns1:buNone/>
+            </ns1:pPr>
+            <ns1:r>
+              <ns1:t/>
+            </ns1:r>
+          </ns1:p>
+          <ns1:p>
+            <ns1:pPr>
+              <ns1:buNone/>
+            </ns1:pPr>
+            <ns1:r>
+              <ns1:t/>
+            </ns1:r>
+          </ns1:p>
+          <ns1:p>
+            <ns1:pPr>
+              <ns1:buNone/>
+            </ns1:pPr>
+            <ns1:r>
+              <ns1:t/>
+            </ns1:r>
+          </ns1:p>
+          <ns1:p>
+            <ns1:pPr>
+              <ns1:buNone/>
+            </ns1:pPr>
+            <ns1:r>
+              <ns1:t/>
+            </ns1:r>
+          </ns1:p>
+          <ns1:p>
+            <ns1:pPr>
+              <ns1:buNone/>
+            </ns1:pPr>
+            <ns1:r>
+              <ns1:t/>
+            </ns1:r>
+          </ns1:p>
+          <ns1:p>
+            <ns1:pPr>
+              <ns1:buNone/>
+            </ns1:pPr>
+            <ns1:r>
+              <ns1:t/>
+            </ns1:r>
+          </ns1:p>
+          <ns1:p>
+            <ns1:pPr>
+              <ns1:buNone/>
+            </ns1:pPr>
+            <ns1:r>
+              <ns1:t/>
+            </ns1:r>
+          </ns1:p>
+          <ns1:p>
+            <ns1:pPr>
+              <ns1:buNone/>
+            </ns1:pPr>
+            <ns1:r>
+              <ns1:t/>
+            </ns1:r>
+          </ns1:p>
+          <ns1:p>
+            <ns1:pPr>
+              <ns1:buNone/>
+            </ns1:pPr>
+            <ns1:r>
+              <ns1:t/>
+            </ns1:r>
+          </ns1:p>
+          <ns1:p>
+            <ns1:pPr>
+              <ns1:buNone/>
+            </ns1:pPr>
+            <ns1:r>
+              <ns1:t/>
+            </ns1:r>
+          </ns1:p>
+          <ns1:p>
+            <ns1:pPr>
+              <ns1:buNone/>
+            </ns1:pPr>
+            <ns1:r>
+              <ns1:t/>
+            </ns1:r>
+          </ns1:p>
+          <ns1:p>
+            <ns1:pPr>
+              <ns1:buNone/>
+            </ns1:pPr>
+            <ns1:r>
+              <ns1:t/>
+            </ns1:r>
+          </ns1:p>
+          <ns1:p>
+            <ns1:pPr>
+              <ns1:buNone/>
+            </ns1:pPr>
+            <ns1:r>
+              <ns1:t/>
+            </ns1:r>
+          </ns1:p>
+          <ns1:p>
+            <ns1:pPr>
+              <ns1:buNone/>
+            </ns1:pPr>
+            <ns1:r>
+              <ns1:t/>
+            </ns1:r>
+          </ns1:p>
+          <ns1:p>
+            <ns1:pPr>
+              <ns1:buNone/>
+            </ns1:pPr>
+            <ns1:r>
+              <ns1:t/>
+            </ns1:r>
+          </ns1:p>
+          <ns1:p>
+            <ns1:pPr>
+              <ns1:buNone/>
+            </ns1:pPr>
+            <ns1:r>
+              <ns1:t/>
+            </ns1:r>
+          </ns1:p>
+          <ns1:p>
+            <ns1:pPr>
+              <ns1:buNone/>
+            </ns1:pPr>
+            <ns1:r>
+              <ns1:t/>
+            </ns1:r>
+          </ns1:p>
+          <ns1:p>
+            <ns1:pPr>
+              <ns1:buNone/>
+            </ns1:pPr>
+            <ns1:r>
+              <ns1:t/>
+            </ns1:r>
+          </ns1:p>
+        </ns0:txBody>
+      </ns0:sp>
+    </ns0:spTree>
+  </ns0:cSld>
+  <ns0:clrMapOvr>
+    <ns1:masterClrMapping/>
+  </ns0:clrMapOvr>
+</ns0:notes>
 </file>
 
 <file path=ppt/notesSlides/notesSlide11.xml><?xml version="1.0" encoding="utf-8"?>
-<p:notes xmlns:a="http://schemas.openxmlformats.org/drawingml/2006/main" xmlns:r="http://schemas.openxmlformats.org/officeDocument/2006/relationships" xmlns:p="http://schemas.openxmlformats.org/presentationml/2006/main" xmlns:m="http://schemas.openxmlformats.org/officeDocument/2006/math" xmlns:a14="http://schemas.microsoft.com/office/drawing/2010/main" showMasterSp="1" showMasterPhAnim="1">
-  <p:cSld>
-    <p:spTree>
-      <p:nvGrpSpPr>
-        <p:cNvPr id="1" name=""/>
-        <p:cNvGrpSpPr/>
-        <p:nvPr/>
-      </p:nvGrpSpPr>
-      <p:grpSpPr>
-        <a:xfrm>
-          <a:off x="0" y="0"/>
-          <a:ext cx="0" cy="0"/>
-          <a:chOff x="0" y="0"/>
-          <a:chExt cx="0" cy="0"/>
-        </a:xfrm>
-      </p:grpSpPr>
-      <p:sp>
-        <p:nvSpPr>
-          <p:cNvPr id="192" name="Shape 192"/>
-          <p:cNvSpPr/>
-          <p:nvPr>
-            <p:ph type="sldImg"/>
-          </p:nvPr>
-        </p:nvSpPr>
-        <p:spPr>
-          <a:prstGeom prst="rect">
-            <a:avLst/>
-          </a:prstGeom>
-        </p:spPr>
-        <p:txBody>
-          <a:bodyPr/>
-          <a:lstStyle/>
-          <a:p>
-            <a:pPr/>
-          </a:p>
-        </p:txBody>
-      </p:sp>
-      <p:sp>
-        <p:nvSpPr>
-          <p:cNvPr id="193" name="Shape 193"/>
-          <p:cNvSpPr/>
-          <p:nvPr>
-            <p:ph type="body" sz="quarter" idx="1"/>
-          </p:nvPr>
-        </p:nvSpPr>
-        <p:spPr>
-          <a:prstGeom prst="rect">
-            <a:avLst/>
-          </a:prstGeom>
-        </p:spPr>
-        <p:txBody>
-          <a:bodyPr/>
-          <a:lstStyle/>
-          <a:p>
-            <a:pPr>
-              <a:buNone/>
-            </a:pPr>
-            <a:r>
-              <a:t>[목표 70초]</a:t>
-            </a:r>
-          </a:p>
-          <a:p>
-            <a:pPr>
-              <a:buNone/>
-            </a:pPr>
-            <a:r>
-              <a:t/>
-            </a:r>
-          </a:p>
-          <a:p>
-            <a:pPr>
-              <a:buNone/>
-            </a:pPr>
-            <a:r>
-              <a:t>[영상 시작 전]</a:t>
-            </a:r>
-          </a:p>
-          <a:p>
-            <a:pPr>
-              <a:buNone/>
-            </a:pPr>
-            <a:r>
-              <a:t>실제 서비스 화면 캡처를 편집한 영상입니다. 도쿄는 오늘 확인한 가상 여행이고, 메일과 일정은 이전에 촬영한 발표용 예시입니다.</a:t>
-            </a:r>
-          </a:p>
-          <a:p>
-            <a:pPr>
-              <a:buNone/>
-            </a:pPr>
-            <a:r>
-              <a:t/>
-            </a:r>
-          </a:p>
-          <a:p>
-            <a:pPr>
-              <a:buNone/>
-            </a:pPr>
-            <a:r>
-              <a:t>[0~20초]</a:t>
-            </a:r>
-          </a:p>
-          <a:p>
-            <a:pPr>
-              <a:buNone/>
-            </a:pPr>
-            <a:r>
-              <a:t>메인에서 최근 장소를 보고 바로 저장할 수 있습니다. 아래 입력창에서 예약 질문을 시작하고, 필요한 기능으로 이어갑니다.</a:t>
-            </a:r>
-          </a:p>
-          <a:p>
-            <a:pPr>
-              <a:buNone/>
-            </a:pPr>
-            <a:r>
-              <a:t/>
-            </a:r>
-          </a:p>
-          <a:p>
-            <a:pPr>
-              <a:buNone/>
-            </a:pPr>
-            <a:r>
-              <a:t>[20~38초]</a:t>
-            </a:r>
-          </a:p>
-          <a:p>
-            <a:pPr>
-              <a:buNone/>
-            </a:pPr>
-            <a:r>
-              <a:t>첫날 예약을 모두 조회한 답변과 출처입니다. 직접 입력한 예약에는 메일 원문이 없다는 점도 확인할 수 있습니다.</a:t>
-            </a:r>
-          </a:p>
-          <a:p>
-            <a:pPr>
-              <a:buNone/>
-            </a:pPr>
-            <a:r>
-              <a:t/>
-            </a:r>
-          </a:p>
-          <a:p>
-            <a:pPr>
-              <a:buNone/>
-            </a:pPr>
-            <a:r>
-              <a:t>[38~54초]</a:t>
-            </a:r>
-          </a:p>
-          <a:p>
-            <a:pPr>
-              <a:buNone/>
-            </a:pPr>
-            <a:r>
-              <a:t>추천 화면에서는 여행 날짜를 이어받고 필요한 필터만 고릅니다. 사진이 없는 곳에는 지도에서 사진을 확인하는 경로를 제공합니다.</a:t>
-            </a:r>
-          </a:p>
-          <a:p>
-            <a:pPr>
-              <a:buNone/>
-            </a:pPr>
-            <a:r>
-              <a:t/>
-            </a:r>
-          </a:p>
-          <a:p>
-            <a:pPr>
-              <a:buNone/>
-            </a:pPr>
-            <a:r>
-              <a:t>[54~64초]</a:t>
-            </a:r>
-          </a:p>
-          <a:p>
-            <a:pPr>
-              <a:buNone/>
-            </a:pPr>
-            <a:r>
-              <a:t>예약 메일과 일정은 기존 발표용 화면입니다. 메일을 확인하고, 일정에서는 고정 예약과 충돌을 살펴봅니다.</a:t>
-            </a:r>
-          </a:p>
-          <a:p>
-            <a:pPr>
-              <a:buNone/>
-            </a:pPr>
-            <a:r>
-              <a:t/>
-            </a:r>
-          </a:p>
-          <a:p>
-            <a:pPr>
-              <a:buNone/>
-            </a:pPr>
-            <a:r>
-              <a:t>[영상 종료 후]</a:t>
-            </a:r>
-          </a:p>
-          <a:p>
-            <a:pPr>
-              <a:buNone/>
-            </a:pPr>
-            <a:r>
-              <a:t>제가 좋아하는 여행과 음식점 탐색을 조금 더 편하게 만들고 싶어서 시작했습니다. 앞으로도 직접 쓰면서 고쳐 나가겠습니다. 감사합니다.</a:t>
-            </a:r>
-          </a:p>
-          <a:p>
-            <a:pPr>
-              <a:buNone/>
-            </a:pPr>
-            <a:r>
-              <a:t/>
-            </a:r>
-          </a:p>
-          <a:p>
-            <a:pPr>
-              <a:buNone/>
-            </a:pPr>
-            <a:r>
-              <a:t>화면 안내: 70초 캡처 편집 영상. 최신 도쿄 화면과 이전 예시 화면의 표시를 참고합니다.</a:t>
-            </a:r>
-          </a:p>
-          <a:p>
-            <a:pPr>
-              <a:buNone/>
-            </a:pPr>
-            <a:r>
-              <a:t/>
-            </a:r>
-          </a:p>
-          <a:p>
-            <a:pPr>
-              <a:buNone/>
-            </a:pPr>
-            <a:r>
-              <a:t>[자료 출처 / 낭독하지 않음]</a:t>
-            </a:r>
-          </a:p>
-          <a:p>
-            <a:pPr>
-              <a:buNone/>
-            </a:pPr>
-            <a:r>
-              <a:t>https://github.com/Jin-s-work/Travel-Agent</a:t>
-            </a:r>
-          </a:p>
-          <a:p>
-            <a:pPr>
-              <a:buNone/>
-            </a:pPr>
-            <a:r>
-              <a:t>최신 화면: docs/screenshots/*-v7.jpg, 2026-10-08 운영 서비스의 가상 도쿄 여행</a:t>
-            </a:r>
-          </a:p>
-          <a:p>
-            <a:pPr>
-              <a:buNone/>
-            </a:pPr>
-            <a:r>
-              <a:t>이전 메일·일정·사진 예시: docs/presentation/CREDITS.md, 2026-10-07 로컬 합성 화면</a:t>
-            </a:r>
-          </a:p>
-          <a:p>
-            <a:pPr>
-              <a:buNone/>
-            </a:pPr>
-            <a:r>
-              <a:t>추천 v5: docs/service-v3/MAIN_RECOMMENDATION_UX.md 및 src/recommendations/hybrid_v5.py</a:t>
-            </a:r>
-          </a:p>
-          <a:p>
-            <a:pPr>
-              <a:buNone/>
-            </a:pPr>
-            <a:r>
-              <a:t>기존 v4 합성 평가: docs/service-v4/reports/hybrid-v4-benchmark.md. v5 결과가 아님.</a:t>
-            </a:r>
-          </a:p>
-          <a:p>
-            <a:pPr>
-              <a:buNone/>
-            </a:pPr>
-            <a:r>
-              <a:t>엄격 현지어 리뷰 추천 OFF. 실제 사용자 만족도 미측정. 100개 도시 입력과 자료 수준은 다름.</a:t>
-            </a:r>
-          </a:p>
-          <a:p>
-            <a:pPr>
-              <a:buNone/>
-            </a:pPr>
-            <a:r>
-              <a:t>사진: Javier Lastras, CC BY 2.0 https://commons.wikimedia.org/wiki/File:Barra_de_Casa_Lucio_(4245090907).jpg</a:t>
-            </a:r>
-          </a:p>
-          <a:p>
-            <a:pPr>
-              <a:buNone/>
-            </a:pPr>
-            <a:r>
-              <a:t>사진: Tamorlan, CC BY-SA 3.0 https://commons.wikimedia.org/wiki/File:Gallina_en_Pepitoria_(Ciriaco).JPG</a:t>
-            </a:r>
-          </a:p>
-          <a:p>
-            <a:pPr>
-              <a:buNone/>
-            </a:pPr>
-            <a:r>
-              <a:t>장소 데이터: OpenStreetMap 기여자 https://www.openstreetmap.org/copyright, Photon https://photon.komoot.io/, GeoNames https://www.geonames.org/</a:t>
-            </a:r>
-          </a:p>
-          <a:p>
-            <a:pPr>
-              <a:buNone/>
-            </a:pPr>
-            <a:r>
-              <a:t>영상은 실제 캡처의 편집본으로 처리 시간이나 클릭을 재현하지 않음.</a:t>
-            </a:r>
-          </a:p>
-        </p:txBody>
-      </p:sp>
-    </p:spTree>
-  </p:cSld>
-  <p:clrMapOvr>
-    <a:masterClrMapping/>
-  </p:clrMapOvr>
-</p:notes>
+<ns0:notes xmlns:ns0="http://schemas.openxmlformats.org/presentationml/2006/main" xmlns:ns1="http://schemas.openxmlformats.org/drawingml/2006/main" showMasterSp="1" showMasterPhAnim="1">
+  <ns0:cSld>
+    <ns0:spTree>
+      <ns0:nvGrpSpPr>
+        <ns0:cNvPr id="1" name=""/>
+        <ns0:cNvGrpSpPr/>
+        <ns0:nvPr/>
+      </ns0:nvGrpSpPr>
+      <ns0:grpSpPr>
+        <ns1:xfrm>
+          <ns1:off x="0" y="0"/>
+          <ns1:ext cx="0" cy="0"/>
+          <ns1:chOff x="0" y="0"/>
+          <ns1:chExt cx="0" cy="0"/>
+        </ns1:xfrm>
+      </ns0:grpSpPr>
+      <ns0:sp>
+        <ns0:nvSpPr>
+          <ns0:cNvPr id="192" name="Shape 192"/>
+          <ns0:cNvSpPr/>
+          <ns0:nvPr>
+            <ns0:ph type="sldImg"/>
+          </ns0:nvPr>
+        </ns0:nvSpPr>
+        <ns0:spPr>
+          <ns1:prstGeom prst="rect">
+            <ns1:avLst/>
+          </ns1:prstGeom>
+        </ns0:spPr>
+        <ns0:txBody>
+          <ns1:bodyPr/>
+          <ns1:lstStyle/>
+          <ns1:p>
+            <ns1:pPr/>
+          </ns1:p>
+        </ns0:txBody>
+      </ns0:sp>
+      <ns0:sp>
+        <ns0:nvSpPr>
+          <ns0:cNvPr id="193" name="Shape 193"/>
+          <ns0:cNvSpPr/>
+          <ns0:nvPr>
+            <ns0:ph type="body" sz="quarter" idx="1"/>
+          </ns0:nvPr>
+        </ns0:nvSpPr>
+        <ns0:spPr>
+          <ns1:prstGeom prst="rect">
+            <ns1:avLst/>
+          </ns1:prstGeom>
+        </ns0:spPr>
+        <ns0:txBody>
+          <ns1:bodyPr/>
+          <ns1:lstStyle/>
+          <ns1:p>
+            <ns1:pPr>
+              <ns1:buNone/>
+            </ns1:pPr>
+            <ns1:r>
+              <ns1:t/>
+            </ns1:r>
+          </ns1:p>
+          <ns1:p>
+            <ns1:pPr>
+              <ns1:buNone/>
+            </ns1:pPr>
+            <ns1:r>
+              <ns1:t/>
+            </ns1:r>
+          </ns1:p>
+          <ns1:p>
+            <ns1:pPr>
+              <ns1:buNone/>
+            </ns1:pPr>
+            <ns1:r>
+              <ns1:t/>
+            </ns1:r>
+          </ns1:p>
+          <ns1:p>
+            <ns1:pPr>
+              <ns1:buNone/>
+            </ns1:pPr>
+            <ns1:r>
+              <ns1:t/>
+            </ns1:r>
+          </ns1:p>
+          <ns1:p>
+            <ns1:pPr>
+              <ns1:buNone/>
+            </ns1:pPr>
+            <ns1:r>
+              <ns1:t/>
+            </ns1:r>
+          </ns1:p>
+          <ns1:p>
+            <ns1:pPr>
+              <ns1:buNone/>
+            </ns1:pPr>
+            <ns1:r>
+              <ns1:t/>
+            </ns1:r>
+          </ns1:p>
+          <ns1:p>
+            <ns1:pPr>
+              <ns1:buNone/>
+            </ns1:pPr>
+            <ns1:r>
+              <ns1:t/>
+            </ns1:r>
+          </ns1:p>
+          <ns1:p>
+            <ns1:pPr>
+              <ns1:buNone/>
+            </ns1:pPr>
+            <ns1:r>
+              <ns1:t/>
+            </ns1:r>
+          </ns1:p>
+          <ns1:p>
+            <ns1:pPr>
+              <ns1:buNone/>
+            </ns1:pPr>
+            <ns1:r>
+              <ns1:t/>
+            </ns1:r>
+          </ns1:p>
+          <ns1:p>
+            <ns1:pPr>
+              <ns1:buNone/>
+            </ns1:pPr>
+            <ns1:r>
+              <ns1:t/>
+            </ns1:r>
+          </ns1:p>
+          <ns1:p>
+            <ns1:pPr>
+              <ns1:buNone/>
+            </ns1:pPr>
+            <ns1:r>
+              <ns1:t/>
+            </ns1:r>
+          </ns1:p>
+          <ns1:p>
+            <ns1:pPr>
+              <ns1:buNone/>
+            </ns1:pPr>
+            <ns1:r>
+              <ns1:t/>
+            </ns1:r>
+          </ns1:p>
+          <ns1:p>
+            <ns1:pPr>
+              <ns1:buNone/>
+            </ns1:pPr>
+            <ns1:r>
+              <ns1:t/>
+            </ns1:r>
+          </ns1:p>
+          <ns1:p>
+            <ns1:pPr>
+              <ns1:buNone/>
+            </ns1:pPr>
+            <ns1:r>
+              <ns1:t/>
+            </ns1:r>
+          </ns1:p>
+          <ns1:p>
+            <ns1:pPr>
+              <ns1:buNone/>
+            </ns1:pPr>
+            <ns1:r>
+              <ns1:t/>
+            </ns1:r>
+          </ns1:p>
+          <ns1:p>
+            <ns1:pPr>
+              <ns1:buNone/>
+            </ns1:pPr>
+            <ns1:r>
+              <ns1:t/>
+            </ns1:r>
+          </ns1:p>
+          <ns1:p>
+            <ns1:pPr>
+              <ns1:buNone/>
+            </ns1:pPr>
+            <ns1:r>
+              <ns1:t/>
+            </ns1:r>
+          </ns1:p>
+          <ns1:p>
+            <ns1:pPr>
+              <ns1:buNone/>
+            </ns1:pPr>
+            <ns1:r>
+              <ns1:t/>
+            </ns1:r>
+          </ns1:p>
+          <ns1:p>
+            <ns1:pPr>
+              <ns1:buNone/>
+            </ns1:pPr>
+            <ns1:r>
+              <ns1:t/>
+            </ns1:r>
+          </ns1:p>
+          <ns1:p>
+            <ns1:pPr>
+              <ns1:buNone/>
+            </ns1:pPr>
+            <ns1:r>
+              <ns1:t/>
+            </ns1:r>
+          </ns1:p>
+          <ns1:p>
+            <ns1:pPr>
+              <ns1:buNone/>
+            </ns1:pPr>
+            <ns1:r>
+              <ns1:t/>
+            </ns1:r>
+          </ns1:p>
+          <ns1:p>
+            <ns1:pPr>
+              <ns1:buNone/>
+            </ns1:pPr>
+            <ns1:r>
+              <ns1:t/>
+            </ns1:r>
+          </ns1:p>
+          <ns1:p>
+            <ns1:pPr>
+              <ns1:buNone/>
+            </ns1:pPr>
+            <ns1:r>
+              <ns1:t/>
+            </ns1:r>
+          </ns1:p>
+          <ns1:p>
+            <ns1:pPr>
+              <ns1:buNone/>
+            </ns1:pPr>
+            <ns1:r>
+              <ns1:t/>
+            </ns1:r>
+          </ns1:p>
+          <ns1:p>
+            <ns1:pPr>
+              <ns1:buNone/>
+            </ns1:pPr>
+            <ns1:r>
+              <ns1:t/>
+            </ns1:r>
+          </ns1:p>
+          <ns1:p>
+            <ns1:pPr>
+              <ns1:buNone/>
+            </ns1:pPr>
+            <ns1:r>
+              <ns1:t/>
+            </ns1:r>
+          </ns1:p>
+          <ns1:p>
+            <ns1:pPr>
+              <ns1:buNone/>
+            </ns1:pPr>
+            <ns1:r>
+              <ns1:t/>
+            </ns1:r>
+          </ns1:p>
+          <ns1:p>
+            <ns1:pPr>
+              <ns1:buNone/>
+            </ns1:pPr>
+            <ns1:r>
+              <ns1:t/>
+            </ns1:r>
+          </ns1:p>
+          <ns1:p>
+            <ns1:pPr>
+              <ns1:buNone/>
+            </ns1:pPr>
+            <ns1:r>
+              <ns1:t/>
+            </ns1:r>
+          </ns1:p>
+          <ns1:p>
+            <ns1:pPr>
+              <ns1:buNone/>
+            </ns1:pPr>
+            <ns1:r>
+              <ns1:t/>
+            </ns1:r>
+          </ns1:p>
+          <ns1:p>
+            <ns1:pPr>
+              <ns1:buNone/>
+            </ns1:pPr>
+            <ns1:r>
+              <ns1:t/>
+            </ns1:r>
+          </ns1:p>
+          <ns1:p>
+            <ns1:pPr>
+              <ns1:buNone/>
+            </ns1:pPr>
+            <ns1:r>
+              <ns1:t/>
+            </ns1:r>
+          </ns1:p>
+          <ns1:p>
+            <ns1:pPr>
+              <ns1:buNone/>
+            </ns1:pPr>
+            <ns1:r>
+              <ns1:t/>
+            </ns1:r>
+          </ns1:p>
+        </ns0:txBody>
+      </ns0:sp>
+    </ns0:spTree>
+  </ns0:cSld>
+  <ns0:clrMapOvr>
+    <ns1:masterClrMapping/>
+  </ns0:clrMapOvr>
+</ns0:notes>
 </file>
 
 <file path=ppt/notesSlides/notesSlide2.xml><?xml version="1.0" encoding="utf-8"?>
-<p:notes xmlns:a="http://schemas.openxmlformats.org/drawingml/2006/main" xmlns:r="http://schemas.openxmlformats.org/officeDocument/2006/relationships" xmlns:p="http://schemas.openxmlformats.org/presentationml/2006/main" xmlns:m="http://schemas.openxmlformats.org/officeDocument/2006/math" xmlns:a14="http://schemas.microsoft.com/office/drawing/2010/main" showMasterSp="1" showMasterPhAnim="1">
-  <p:cSld>
-    <p:spTree>
-      <p:nvGrpSpPr>
-        <p:cNvPr id="1" name=""/>
-        <p:cNvGrpSpPr/>
-        <p:nvPr/>
-      </p:nvGrpSpPr>
-      <p:grpSpPr>
-        <a:xfrm>
-          <a:off x="0" y="0"/>
-          <a:ext cx="0" cy="0"/>
-          <a:chOff x="0" y="0"/>
-          <a:chExt cx="0" cy="0"/>
-        </a:xfrm>
-      </p:grpSpPr>
-      <p:sp>
-        <p:nvSpPr>
-          <p:cNvPr id="86" name="Shape 86"/>
-          <p:cNvSpPr/>
-          <p:nvPr>
-            <p:ph type="sldImg"/>
-          </p:nvPr>
-        </p:nvSpPr>
-        <p:spPr>
-          <a:prstGeom prst="rect">
-            <a:avLst/>
-          </a:prstGeom>
-        </p:spPr>
-        <p:txBody>
-          <a:bodyPr/>
-          <a:lstStyle/>
-          <a:p>
-            <a:pPr/>
-          </a:p>
-        </p:txBody>
-      </p:sp>
-      <p:sp>
-        <p:nvSpPr>
-          <p:cNvPr id="87" name="Shape 87"/>
-          <p:cNvSpPr/>
-          <p:nvPr>
-            <p:ph type="body" sz="quarter" idx="1"/>
-          </p:nvPr>
-        </p:nvSpPr>
-        <p:spPr>
-          <a:prstGeom prst="rect">
-            <a:avLst/>
-          </a:prstGeom>
-        </p:spPr>
-        <p:txBody>
-          <a:bodyPr/>
-          <a:lstStyle/>
-          <a:p>
-            <a:pPr>
-              <a:buNone/>
-            </a:pPr>
-            <a:r>
-              <a:t>[목표 45초]</a:t>
-            </a:r>
-          </a:p>
-          <a:p>
-            <a:pPr>
-              <a:buNone/>
-            </a:pPr>
-            <a:r>
-              <a:t/>
-            </a:r>
-          </a:p>
-          <a:p>
-            <a:pPr>
-              <a:buNone/>
-            </a:pPr>
-            <a:r>
-              <a:t>예를 들어 도쿄 여행을 간다고 하면, 먼저 어디에서 밥을 먹을지 검색합니다. 한국어로 많이 소개된 곳도 좋지만, 현지어 리뷰가 많은 다른 식당도 찾아보고 싶었습니다. 그러다 마음에 드는 곳을 찾으면 이번에는 숙소와의 거리, 영업시간, 예약 방법을 따로 확인해야 했습니다.</a:t>
-            </a:r>
-          </a:p>
-          <a:p>
-            <a:pPr>
-              <a:buNone/>
-            </a:pPr>
-            <a:r>
-              <a:t/>
-            </a:r>
-          </a:p>
-          <a:p>
-            <a:pPr>
-              <a:buNone/>
-            </a:pPr>
-            <a:r>
-              <a:t>이미 예약한 항공권이나 호텔 정보는 메일에 있고, 가고 싶은 장소는 지도에 있고, 하루 일정은 메모에 있었습니다. 정보를 하나씩 찾는 것보다 그걸 서로 맞춰 보는 과정이 더 번거로웠습니다.</a:t>
-            </a:r>
-          </a:p>
-          <a:p>
-            <a:pPr>
-              <a:buNone/>
-            </a:pPr>
-            <a:r>
-              <a:t/>
-            </a:r>
-          </a:p>
-          <a:p>
-            <a:pPr>
-              <a:buNone/>
-            </a:pPr>
-            <a:r>
-              <a:t>그래서 고잉은 여행 하나 안에서 예약과 장소, 일정을 이어서 볼 수 있게 기획했습니다.</a:t>
-            </a:r>
-          </a:p>
-          <a:p>
-            <a:pPr>
-              <a:buNone/>
-            </a:pPr>
-            <a:r>
-              <a:t/>
-            </a:r>
-          </a:p>
-          <a:p>
-            <a:pPr>
-              <a:buNone/>
-            </a:pPr>
-            <a:r>
-              <a:t>화면 안내: 식당을 고르는 질문과 예약을 확인하는 질문을 차례로 짚습니다.</a:t>
-            </a:r>
-          </a:p>
-          <a:p>
-            <a:pPr>
-              <a:buNone/>
-            </a:pPr>
-            <a:r>
-              <a:t/>
-            </a:r>
-          </a:p>
-          <a:p>
-            <a:pPr>
-              <a:buNone/>
-            </a:pPr>
-            <a:r>
-              <a:t>[자료 출처 / 낭독하지 않음]</a:t>
-            </a:r>
-          </a:p>
-          <a:p>
-            <a:pPr>
-              <a:buNone/>
-            </a:pPr>
-            <a:r>
-              <a:t>https://github.com/Jin-s-work/Travel-Agent</a:t>
-            </a:r>
-          </a:p>
-          <a:p>
-            <a:pPr>
-              <a:buNone/>
-            </a:pPr>
-            <a:r>
-              <a:t>최신 화면: docs/screenshots/*-v7.jpg, 2026-10-08 운영 서비스의 가상 도쿄 여행</a:t>
-            </a:r>
-          </a:p>
-          <a:p>
-            <a:pPr>
-              <a:buNone/>
-            </a:pPr>
-            <a:r>
-              <a:t>이전 메일·일정·사진 예시: docs/presentation/CREDITS.md, 2026-10-07 로컬 합성 화면</a:t>
-            </a:r>
-          </a:p>
-          <a:p>
-            <a:pPr>
-              <a:buNone/>
-            </a:pPr>
-            <a:r>
-              <a:t>추천 v5: docs/service-v3/MAIN_RECOMMENDATION_UX.md 및 src/recommendations/hybrid_v5.py</a:t>
-            </a:r>
-          </a:p>
-          <a:p>
-            <a:pPr>
-              <a:buNone/>
-            </a:pPr>
-            <a:r>
-              <a:t>기존 v4 합성 평가: docs/service-v4/reports/hybrid-v4-benchmark.md. v5 결과가 아님.</a:t>
-            </a:r>
-          </a:p>
-          <a:p>
-            <a:pPr>
-              <a:buNone/>
-            </a:pPr>
-            <a:r>
-              <a:t>엄격 현지어 리뷰 추천 OFF. 실제 사용자 만족도 미측정. 100개 도시 입력과 자료 수준은 다름.</a:t>
-            </a:r>
-          </a:p>
-          <a:p>
-            <a:pPr>
-              <a:buNone/>
-            </a:pPr>
-            <a:r>
-              <a:t>사진: Javier Lastras, CC BY 2.0 https://commons.wikimedia.org/wiki/File:Barra_de_Casa_Lucio_(4245090907).jpg</a:t>
-            </a:r>
-          </a:p>
-          <a:p>
-            <a:pPr>
-              <a:buNone/>
-            </a:pPr>
-            <a:r>
-              <a:t>사진: Tamorlan, CC BY-SA 3.0 https://commons.wikimedia.org/wiki/File:Gallina_en_Pepitoria_(Ciriaco).JPG</a:t>
-            </a:r>
-          </a:p>
-          <a:p>
-            <a:pPr>
-              <a:buNone/>
-            </a:pPr>
-            <a:r>
-              <a:t>장소 데이터: OpenStreetMap 기여자 https://www.openstreetmap.org/copyright, Photon https://photon.komoot.io/, GeoNames https://www.geonames.org/</a:t>
-            </a:r>
-          </a:p>
-          <a:p>
-            <a:pPr>
-              <a:buNone/>
-            </a:pPr>
-            <a:r>
-              <a:t>영상은 실제 캡처의 편집본으로 처리 시간이나 클릭을 재현하지 않음.</a:t>
-            </a:r>
-          </a:p>
-        </p:txBody>
-      </p:sp>
-    </p:spTree>
-  </p:cSld>
-  <p:clrMapOvr>
-    <a:masterClrMapping/>
-  </p:clrMapOvr>
-</p:notes>
+<ns0:notes xmlns:ns0="http://schemas.openxmlformats.org/presentationml/2006/main" xmlns:ns1="http://schemas.openxmlformats.org/drawingml/2006/main" showMasterSp="1" showMasterPhAnim="1">
+  <ns0:cSld>
+    <ns0:spTree>
+      <ns0:nvGrpSpPr>
+        <ns0:cNvPr id="1" name=""/>
+        <ns0:cNvGrpSpPr/>
+        <ns0:nvPr/>
+      </ns0:nvGrpSpPr>
+      <ns0:grpSpPr>
+        <ns1:xfrm>
+          <ns1:off x="0" y="0"/>
+          <ns1:ext cx="0" cy="0"/>
+          <ns1:chOff x="0" y="0"/>
+          <ns1:chExt cx="0" cy="0"/>
+        </ns1:xfrm>
+      </ns0:grpSpPr>
+      <ns0:sp>
+        <ns0:nvSpPr>
+          <ns0:cNvPr id="86" name="Shape 86"/>
+          <ns0:cNvSpPr/>
+          <ns0:nvPr>
+            <ns0:ph type="sldImg"/>
+          </ns0:nvPr>
+        </ns0:nvSpPr>
+        <ns0:spPr>
+          <ns1:prstGeom prst="rect">
+            <ns1:avLst/>
+          </ns1:prstGeom>
+        </ns0:spPr>
+        <ns0:txBody>
+          <ns1:bodyPr/>
+          <ns1:lstStyle/>
+          <ns1:p>
+            <ns1:pPr/>
+          </ns1:p>
+        </ns0:txBody>
+      </ns0:sp>
+      <ns0:sp>
+        <ns0:nvSpPr>
+          <ns0:cNvPr id="87" name="Shape 87"/>
+          <ns0:cNvSpPr/>
+          <ns0:nvPr>
+            <ns0:ph type="body" sz="quarter" idx="1"/>
+          </ns0:nvPr>
+        </ns0:nvSpPr>
+        <ns0:spPr>
+          <ns1:prstGeom prst="rect">
+            <ns1:avLst/>
+          </ns1:prstGeom>
+        </ns0:spPr>
+        <ns0:txBody>
+          <ns1:bodyPr/>
+          <ns1:lstStyle/>
+          <ns1:p>
+            <ns1:pPr>
+              <ns1:buNone/>
+            </ns1:pPr>
+            <ns1:r>
+              <ns1:t/>
+            </ns1:r>
+          </ns1:p>
+          <ns1:p>
+            <ns1:pPr>
+              <ns1:buNone/>
+            </ns1:pPr>
+            <ns1:r>
+              <ns1:t/>
+            </ns1:r>
+          </ns1:p>
+          <ns1:p>
+            <ns1:pPr>
+              <ns1:buNone/>
+            </ns1:pPr>
+            <ns1:r>
+              <ns1:t/>
+            </ns1:r>
+          </ns1:p>
+          <ns1:p>
+            <ns1:pPr>
+              <ns1:buNone/>
+            </ns1:pPr>
+            <ns1:r>
+              <ns1:t/>
+            </ns1:r>
+          </ns1:p>
+          <ns1:p>
+            <ns1:pPr>
+              <ns1:buNone/>
+            </ns1:pPr>
+            <ns1:r>
+              <ns1:t/>
+            </ns1:r>
+          </ns1:p>
+          <ns1:p>
+            <ns1:pPr>
+              <ns1:buNone/>
+            </ns1:pPr>
+            <ns1:r>
+              <ns1:t/>
+            </ns1:r>
+          </ns1:p>
+          <ns1:p>
+            <ns1:pPr>
+              <ns1:buNone/>
+            </ns1:pPr>
+            <ns1:r>
+              <ns1:t/>
+            </ns1:r>
+          </ns1:p>
+          <ns1:p>
+            <ns1:pPr>
+              <ns1:buNone/>
+            </ns1:pPr>
+            <ns1:r>
+              <ns1:t/>
+            </ns1:r>
+          </ns1:p>
+          <ns1:p>
+            <ns1:pPr>
+              <ns1:buNone/>
+            </ns1:pPr>
+            <ns1:r>
+              <ns1:t/>
+            </ns1:r>
+          </ns1:p>
+          <ns1:p>
+            <ns1:pPr>
+              <ns1:buNone/>
+            </ns1:pPr>
+            <ns1:r>
+              <ns1:t/>
+            </ns1:r>
+          </ns1:p>
+          <ns1:p>
+            <ns1:pPr>
+              <ns1:buNone/>
+            </ns1:pPr>
+            <ns1:r>
+              <ns1:t/>
+            </ns1:r>
+          </ns1:p>
+          <ns1:p>
+            <ns1:pPr>
+              <ns1:buNone/>
+            </ns1:pPr>
+            <ns1:r>
+              <ns1:t/>
+            </ns1:r>
+          </ns1:p>
+          <ns1:p>
+            <ns1:pPr>
+              <ns1:buNone/>
+            </ns1:pPr>
+            <ns1:r>
+              <ns1:t/>
+            </ns1:r>
+          </ns1:p>
+          <ns1:p>
+            <ns1:pPr>
+              <ns1:buNone/>
+            </ns1:pPr>
+            <ns1:r>
+              <ns1:t/>
+            </ns1:r>
+          </ns1:p>
+          <ns1:p>
+            <ns1:pPr>
+              <ns1:buNone/>
+            </ns1:pPr>
+            <ns1:r>
+              <ns1:t/>
+            </ns1:r>
+          </ns1:p>
+          <ns1:p>
+            <ns1:pPr>
+              <ns1:buNone/>
+            </ns1:pPr>
+            <ns1:r>
+              <ns1:t/>
+            </ns1:r>
+          </ns1:p>
+          <ns1:p>
+            <ns1:pPr>
+              <ns1:buNone/>
+            </ns1:pPr>
+            <ns1:r>
+              <ns1:t/>
+            </ns1:r>
+          </ns1:p>
+          <ns1:p>
+            <ns1:pPr>
+              <ns1:buNone/>
+            </ns1:pPr>
+            <ns1:r>
+              <ns1:t/>
+            </ns1:r>
+          </ns1:p>
+          <ns1:p>
+            <ns1:pPr>
+              <ns1:buNone/>
+            </ns1:pPr>
+            <ns1:r>
+              <ns1:t/>
+            </ns1:r>
+          </ns1:p>
+          <ns1:p>
+            <ns1:pPr>
+              <ns1:buNone/>
+            </ns1:pPr>
+            <ns1:r>
+              <ns1:t/>
+            </ns1:r>
+          </ns1:p>
+          <ns1:p>
+            <ns1:pPr>
+              <ns1:buNone/>
+            </ns1:pPr>
+            <ns1:r>
+              <ns1:t/>
+            </ns1:r>
+          </ns1:p>
+        </ns0:txBody>
+      </ns0:sp>
+    </ns0:spTree>
+  </ns0:cSld>
+  <ns0:clrMapOvr>
+    <ns1:masterClrMapping/>
+  </ns0:clrMapOvr>
+</ns0:notes>
 </file>
 
 <file path=ppt/notesSlides/notesSlide3.xml><?xml version="1.0" encoding="utf-8"?>
-<p:notes xmlns:a="http://schemas.openxmlformats.org/drawingml/2006/main" xmlns:r="http://schemas.openxmlformats.org/officeDocument/2006/relationships" xmlns:p="http://schemas.openxmlformats.org/presentationml/2006/main" xmlns:m="http://schemas.openxmlformats.org/officeDocument/2006/math" xmlns:a14="http://schemas.microsoft.com/office/drawing/2010/main" showMasterSp="1" showMasterPhAnim="1">
-  <p:cSld>
-    <p:spTree>
-      <p:nvGrpSpPr>
-        <p:cNvPr id="1" name=""/>
-        <p:cNvGrpSpPr/>
-        <p:nvPr/>
-      </p:nvGrpSpPr>
-      <p:grpSpPr>
-        <a:xfrm>
-          <a:off x="0" y="0"/>
-          <a:ext cx="0" cy="0"/>
-          <a:chOff x="0" y="0"/>
-          <a:chExt cx="0" cy="0"/>
-        </a:xfrm>
-      </p:grpSpPr>
-      <p:sp>
-        <p:nvSpPr>
-          <p:cNvPr id="97" name="Shape 97"/>
-          <p:cNvSpPr/>
-          <p:nvPr>
-            <p:ph type="sldImg"/>
-          </p:nvPr>
-        </p:nvSpPr>
-        <p:spPr>
-          <a:prstGeom prst="rect">
-            <a:avLst/>
-          </a:prstGeom>
-        </p:spPr>
-        <p:txBody>
-          <a:bodyPr/>
-          <a:lstStyle/>
-          <a:p>
-            <a:pPr/>
-          </a:p>
-        </p:txBody>
-      </p:sp>
-      <p:sp>
-        <p:nvSpPr>
-          <p:cNvPr id="98" name="Shape 98"/>
-          <p:cNvSpPr/>
-          <p:nvPr>
-            <p:ph type="body" sz="quarter" idx="1"/>
-          </p:nvPr>
-        </p:nvSpPr>
-        <p:spPr>
-          <a:prstGeom prst="rect">
-            <a:avLst/>
-          </a:prstGeom>
-        </p:spPr>
-        <p:txBody>
-          <a:bodyPr/>
-          <a:lstStyle/>
-          <a:p>
-            <a:pPr>
-              <a:buNone/>
-            </a:pPr>
-            <a:r>
-              <a:t>[목표 35초]</a:t>
-            </a:r>
-          </a:p>
-          <a:p>
-            <a:pPr>
-              <a:buNone/>
-            </a:pPr>
-            <a:r>
-              <a:t/>
-            </a:r>
-          </a:p>
-          <a:p>
-            <a:pPr>
-              <a:buNone/>
-            </a:pPr>
-            <a:r>
-              <a:t>사용할 때는 도시와 날짜로 여행을 하나 만듭니다. 그다음에는 같은 정보를 매번 입력하지 않아도 됩니다. 숙소나 음식 취향은 필요할 때 추가하면 됩니다.</a:t>
-            </a:r>
-          </a:p>
-          <a:p>
-            <a:pPr>
-              <a:buNone/>
-            </a:pPr>
-            <a:r>
-              <a:t/>
-            </a:r>
-          </a:p>
-          <a:p>
-            <a:pPr>
-              <a:buNone/>
-            </a:pPr>
-            <a:r>
-              <a:t>기능을 늘리다 보니 오히려 어디서 시작해야 할지 알기 어려워진 적이 있었습니다. 그래서 가장 많이 쓰는 추천과 AI 질문을 메인으로 꺼냈습니다. 최근 살펴본 장소 세 곳에서 상세를 보거나 바로 저장하고, 아래에서는 예약에 대해 물어볼 수 있습니다.</a:t>
-            </a:r>
-          </a:p>
-          <a:p>
-            <a:pPr>
-              <a:buNone/>
-            </a:pPr>
-            <a:r>
-              <a:t/>
-            </a:r>
-          </a:p>
-          <a:p>
-            <a:pPr>
-              <a:buNone/>
-            </a:pPr>
-            <a:r>
-              <a:t>추천을 기다리다가 다른 화면으로 가도 진행 상태가 이어집니다. 여행을 바꿀 때도 보고 있던 메뉴를 유지하도록 고쳤습니다. 화면은 배포된 서비스에 넣은 가상 도쿄 여행입니다.</a:t>
-            </a:r>
-          </a:p>
-          <a:p>
-            <a:pPr>
-              <a:buNone/>
-            </a:pPr>
-            <a:r>
-              <a:t/>
-            </a:r>
-          </a:p>
-          <a:p>
-            <a:pPr>
-              <a:buNone/>
-            </a:pPr>
-            <a:r>
-              <a:t>화면 안내: 홈의 추천 카드와 바로 아래 AI 질문 입력창을 차례로 짚습니다.</a:t>
-            </a:r>
-          </a:p>
-          <a:p>
-            <a:pPr>
-              <a:buNone/>
-            </a:pPr>
-            <a:r>
-              <a:t/>
-            </a:r>
-          </a:p>
-          <a:p>
-            <a:pPr>
-              <a:buNone/>
-            </a:pPr>
-            <a:r>
-              <a:t>[자료 출처 / 낭독하지 않음]</a:t>
-            </a:r>
-          </a:p>
-          <a:p>
-            <a:pPr>
-              <a:buNone/>
-            </a:pPr>
-            <a:r>
-              <a:t>https://github.com/Jin-s-work/Travel-Agent</a:t>
-            </a:r>
-          </a:p>
-          <a:p>
-            <a:pPr>
-              <a:buNone/>
-            </a:pPr>
-            <a:r>
-              <a:t>최신 화면: docs/screenshots/*-v7.jpg, 2026-10-08 운영 서비스의 가상 도쿄 여행</a:t>
-            </a:r>
-          </a:p>
-          <a:p>
-            <a:pPr>
-              <a:buNone/>
-            </a:pPr>
-            <a:r>
-              <a:t>이전 메일·일정·사진 예시: docs/presentation/CREDITS.md, 2026-10-07 로컬 합성 화면</a:t>
-            </a:r>
-          </a:p>
-          <a:p>
-            <a:pPr>
-              <a:buNone/>
-            </a:pPr>
-            <a:r>
-              <a:t>추천 v5: docs/service-v3/MAIN_RECOMMENDATION_UX.md 및 src/recommendations/hybrid_v5.py</a:t>
-            </a:r>
-          </a:p>
-          <a:p>
-            <a:pPr>
-              <a:buNone/>
-            </a:pPr>
-            <a:r>
-              <a:t>기존 v4 합성 평가: docs/service-v4/reports/hybrid-v4-benchmark.md. v5 결과가 아님.</a:t>
-            </a:r>
-          </a:p>
-          <a:p>
-            <a:pPr>
-              <a:buNone/>
-            </a:pPr>
-            <a:r>
-              <a:t>엄격 현지어 리뷰 추천 OFF. 실제 사용자 만족도 미측정. 100개 도시 입력과 자료 수준은 다름.</a:t>
-            </a:r>
-          </a:p>
-          <a:p>
-            <a:pPr>
-              <a:buNone/>
-            </a:pPr>
-            <a:r>
-              <a:t>사진: Javier Lastras, CC BY 2.0 https://commons.wikimedia.org/wiki/File:Barra_de_Casa_Lucio_(4245090907).jpg</a:t>
-            </a:r>
-          </a:p>
-          <a:p>
-            <a:pPr>
-              <a:buNone/>
-            </a:pPr>
-            <a:r>
-              <a:t>사진: Tamorlan, CC BY-SA 3.0 https://commons.wikimedia.org/wiki/File:Gallina_en_Pepitoria_(Ciriaco).JPG</a:t>
-            </a:r>
-          </a:p>
-          <a:p>
-            <a:pPr>
-              <a:buNone/>
-            </a:pPr>
-            <a:r>
-              <a:t>장소 데이터: OpenStreetMap 기여자 https://www.openstreetmap.org/copyright, Photon https://photon.komoot.io/, GeoNames https://www.geonames.org/</a:t>
-            </a:r>
-          </a:p>
-          <a:p>
-            <a:pPr>
-              <a:buNone/>
-            </a:pPr>
-            <a:r>
-              <a:t>영상은 실제 캡처의 편집본으로 처리 시간이나 클릭을 재현하지 않음.</a:t>
-            </a:r>
-          </a:p>
-        </p:txBody>
-      </p:sp>
-    </p:spTree>
-  </p:cSld>
-  <p:clrMapOvr>
-    <a:masterClrMapping/>
-  </p:clrMapOvr>
-</p:notes>
+<ns0:notes xmlns:ns0="http://schemas.openxmlformats.org/presentationml/2006/main" xmlns:ns1="http://schemas.openxmlformats.org/drawingml/2006/main" showMasterSp="1" showMasterPhAnim="1">
+  <ns0:cSld>
+    <ns0:spTree>
+      <ns0:nvGrpSpPr>
+        <ns0:cNvPr id="1" name=""/>
+        <ns0:cNvGrpSpPr/>
+        <ns0:nvPr/>
+      </ns0:nvGrpSpPr>
+      <ns0:grpSpPr>
+        <ns1:xfrm>
+          <ns1:off x="0" y="0"/>
+          <ns1:ext cx="0" cy="0"/>
+          <ns1:chOff x="0" y="0"/>
+          <ns1:chExt cx="0" cy="0"/>
+        </ns1:xfrm>
+      </ns0:grpSpPr>
+      <ns0:sp>
+        <ns0:nvSpPr>
+          <ns0:cNvPr id="97" name="Shape 97"/>
+          <ns0:cNvSpPr/>
+          <ns0:nvPr>
+            <ns0:ph type="sldImg"/>
+          </ns0:nvPr>
+        </ns0:nvSpPr>
+        <ns0:spPr>
+          <ns1:prstGeom prst="rect">
+            <ns1:avLst/>
+          </ns1:prstGeom>
+        </ns0:spPr>
+        <ns0:txBody>
+          <ns1:bodyPr/>
+          <ns1:lstStyle/>
+          <ns1:p>
+            <ns1:pPr/>
+          </ns1:p>
+        </ns0:txBody>
+      </ns0:sp>
+      <ns0:sp>
+        <ns0:nvSpPr>
+          <ns0:cNvPr id="98" name="Shape 98"/>
+          <ns0:cNvSpPr/>
+          <ns0:nvPr>
+            <ns0:ph type="body" sz="quarter" idx="1"/>
+          </ns0:nvPr>
+        </ns0:nvSpPr>
+        <ns0:spPr>
+          <ns1:prstGeom prst="rect">
+            <ns1:avLst/>
+          </ns1:prstGeom>
+        </ns0:spPr>
+        <ns0:txBody>
+          <ns1:bodyPr/>
+          <ns1:lstStyle/>
+          <ns1:p>
+            <ns1:pPr>
+              <ns1:buNone/>
+            </ns1:pPr>
+            <ns1:r>
+              <ns1:t/>
+            </ns1:r>
+          </ns1:p>
+          <ns1:p>
+            <ns1:pPr>
+              <ns1:buNone/>
+            </ns1:pPr>
+            <ns1:r>
+              <ns1:t/>
+            </ns1:r>
+          </ns1:p>
+          <ns1:p>
+            <ns1:pPr>
+              <ns1:buNone/>
+            </ns1:pPr>
+            <ns1:r>
+              <ns1:t/>
+            </ns1:r>
+          </ns1:p>
+          <ns1:p>
+            <ns1:pPr>
+              <ns1:buNone/>
+            </ns1:pPr>
+            <ns1:r>
+              <ns1:t/>
+            </ns1:r>
+          </ns1:p>
+          <ns1:p>
+            <ns1:pPr>
+              <ns1:buNone/>
+            </ns1:pPr>
+            <ns1:r>
+              <ns1:t/>
+            </ns1:r>
+          </ns1:p>
+          <ns1:p>
+            <ns1:pPr>
+              <ns1:buNone/>
+            </ns1:pPr>
+            <ns1:r>
+              <ns1:t/>
+            </ns1:r>
+          </ns1:p>
+          <ns1:p>
+            <ns1:pPr>
+              <ns1:buNone/>
+            </ns1:pPr>
+            <ns1:r>
+              <ns1:t/>
+            </ns1:r>
+          </ns1:p>
+          <ns1:p>
+            <ns1:pPr>
+              <ns1:buNone/>
+            </ns1:pPr>
+            <ns1:r>
+              <ns1:t/>
+            </ns1:r>
+          </ns1:p>
+          <ns1:p>
+            <ns1:pPr>
+              <ns1:buNone/>
+            </ns1:pPr>
+            <ns1:r>
+              <ns1:t/>
+            </ns1:r>
+          </ns1:p>
+          <ns1:p>
+            <ns1:pPr>
+              <ns1:buNone/>
+            </ns1:pPr>
+            <ns1:r>
+              <ns1:t/>
+            </ns1:r>
+          </ns1:p>
+          <ns1:p>
+            <ns1:pPr>
+              <ns1:buNone/>
+            </ns1:pPr>
+            <ns1:r>
+              <ns1:t/>
+            </ns1:r>
+          </ns1:p>
+          <ns1:p>
+            <ns1:pPr>
+              <ns1:buNone/>
+            </ns1:pPr>
+            <ns1:r>
+              <ns1:t/>
+            </ns1:r>
+          </ns1:p>
+          <ns1:p>
+            <ns1:pPr>
+              <ns1:buNone/>
+            </ns1:pPr>
+            <ns1:r>
+              <ns1:t/>
+            </ns1:r>
+          </ns1:p>
+          <ns1:p>
+            <ns1:pPr>
+              <ns1:buNone/>
+            </ns1:pPr>
+            <ns1:r>
+              <ns1:t/>
+            </ns1:r>
+          </ns1:p>
+          <ns1:p>
+            <ns1:pPr>
+              <ns1:buNone/>
+            </ns1:pPr>
+            <ns1:r>
+              <ns1:t/>
+            </ns1:r>
+          </ns1:p>
+          <ns1:p>
+            <ns1:pPr>
+              <ns1:buNone/>
+            </ns1:pPr>
+            <ns1:r>
+              <ns1:t/>
+            </ns1:r>
+          </ns1:p>
+          <ns1:p>
+            <ns1:pPr>
+              <ns1:buNone/>
+            </ns1:pPr>
+            <ns1:r>
+              <ns1:t/>
+            </ns1:r>
+          </ns1:p>
+          <ns1:p>
+            <ns1:pPr>
+              <ns1:buNone/>
+            </ns1:pPr>
+            <ns1:r>
+              <ns1:t/>
+            </ns1:r>
+          </ns1:p>
+          <ns1:p>
+            <ns1:pPr>
+              <ns1:buNone/>
+            </ns1:pPr>
+            <ns1:r>
+              <ns1:t/>
+            </ns1:r>
+          </ns1:p>
+          <ns1:p>
+            <ns1:pPr>
+              <ns1:buNone/>
+            </ns1:pPr>
+            <ns1:r>
+              <ns1:t/>
+            </ns1:r>
+          </ns1:p>
+          <ns1:p>
+            <ns1:pPr>
+              <ns1:buNone/>
+            </ns1:pPr>
+            <ns1:r>
+              <ns1:t/>
+            </ns1:r>
+          </ns1:p>
+        </ns0:txBody>
+      </ns0:sp>
+    </ns0:spTree>
+  </ns0:cSld>
+  <ns0:clrMapOvr>
+    <ns1:masterClrMapping/>
+  </ns0:clrMapOvr>
+</ns0:notes>
 </file>
 
 <file path=ppt/notesSlides/notesSlide4.xml><?xml version="1.0" encoding="utf-8"?>
-<p:notes xmlns:a="http://schemas.openxmlformats.org/drawingml/2006/main" xmlns:r="http://schemas.openxmlformats.org/officeDocument/2006/relationships" xmlns:p="http://schemas.openxmlformats.org/presentationml/2006/main" xmlns:m="http://schemas.openxmlformats.org/officeDocument/2006/math" xmlns:a14="http://schemas.microsoft.com/office/drawing/2010/main" showMasterSp="1" showMasterPhAnim="1">
-  <p:cSld>
-    <p:spTree>
-      <p:nvGrpSpPr>
-        <p:cNvPr id="1" name=""/>
-        <p:cNvGrpSpPr/>
-        <p:nvPr/>
-      </p:nvGrpSpPr>
-      <p:grpSpPr>
-        <a:xfrm>
-          <a:off x="0" y="0"/>
-          <a:ext cx="0" cy="0"/>
-          <a:chOff x="0" y="0"/>
-          <a:chExt cx="0" cy="0"/>
-        </a:xfrm>
-      </p:grpSpPr>
-      <p:sp>
-        <p:nvSpPr>
-          <p:cNvPr id="109" name="Shape 109"/>
-          <p:cNvSpPr/>
-          <p:nvPr>
-            <p:ph type="sldImg"/>
-          </p:nvPr>
-        </p:nvSpPr>
-        <p:spPr>
-          <a:prstGeom prst="rect">
-            <a:avLst/>
-          </a:prstGeom>
-        </p:spPr>
-        <p:txBody>
-          <a:bodyPr/>
-          <a:lstStyle/>
-          <a:p>
-            <a:pPr/>
-          </a:p>
-        </p:txBody>
-      </p:sp>
-      <p:sp>
-        <p:nvSpPr>
-          <p:cNvPr id="110" name="Shape 110"/>
-          <p:cNvSpPr/>
-          <p:nvPr>
-            <p:ph type="body" sz="quarter" idx="1"/>
-          </p:nvPr>
-        </p:nvSpPr>
-        <p:spPr>
-          <a:prstGeom prst="rect">
-            <a:avLst/>
-          </a:prstGeom>
-        </p:spPr>
-        <p:txBody>
-          <a:bodyPr/>
-          <a:lstStyle/>
-          <a:p>
-            <a:pPr>
-              <a:buNone/>
-            </a:pPr>
-            <a:r>
-              <a:t>[목표 50초]</a:t>
-            </a:r>
-          </a:p>
-          <a:p>
-            <a:pPr>
-              <a:buNone/>
-            </a:pPr>
-            <a:r>
-              <a:t/>
-            </a:r>
-          </a:p>
-          <a:p>
-            <a:pPr>
-              <a:buNone/>
-            </a:pPr>
-            <a:r>
-              <a:t>가장 먼저 만든 기능은 예약 메일 분석이었습니다. 항공권이나 숙소 확인 메일을 올리면 날짜, 시간, 장소 같은 내용을 예약으로 정리합니다. 한 메일에 여러 예약이 있거나 왕복 항공편이 들어 있는 경우도 구분해서 보관합니다.</a:t>
-            </a:r>
-          </a:p>
-          <a:p>
-            <a:pPr>
-              <a:buNone/>
-            </a:pPr>
-            <a:r>
-              <a:t/>
-            </a:r>
-          </a:p>
-          <a:p>
-            <a:pPr>
-              <a:buNone/>
-            </a:pPr>
-            <a:r>
-              <a:t>이때 AI가 읽은 내용을 바로 확정된 사실로 취급하지는 않습니다. 사용자가 확인하고 잘못된 값을 수정할 수 있게 했습니다. 사용자가 고친 값은 원래 추출한 값과 따로 저장해서 다시 분석해도 사라지지 않도록 했습니다.</a:t>
-            </a:r>
-          </a:p>
-          <a:p>
-            <a:pPr>
-              <a:buNone/>
-            </a:pPr>
-            <a:r>
-              <a:t/>
-            </a:r>
-          </a:p>
-          <a:p>
-            <a:pPr>
-              <a:buNone/>
-            </a:pPr>
-            <a:r>
-              <a:t>실제 AI 분석에는 OpenAI gpt-5-mini를 사용합니다. 지금 화면은 발표용 가상 메일을 비용 없는 기본 분석으로 처리한 예시입니다. 분석이 실패했을 때 기존 예약을 지우지 않고, 작업 상태를 다시 확인할 수 있도록 만드는 데도 신경 썼습니다.</a:t>
-            </a:r>
-          </a:p>
-          <a:p>
-            <a:pPr>
-              <a:buNone/>
-            </a:pPr>
-            <a:r>
-              <a:t/>
-            </a:r>
-          </a:p>
-          <a:p>
-            <a:pPr>
-              <a:buNone/>
-            </a:pPr>
-            <a:r>
-              <a:t>화면 안내: 호텔의 체크인·체크아웃 시간과 확인 필요 상태를 짚습니다.</a:t>
-            </a:r>
-          </a:p>
-          <a:p>
-            <a:pPr>
-              <a:buNone/>
-            </a:pPr>
-            <a:r>
-              <a:t/>
-            </a:r>
-          </a:p>
-          <a:p>
-            <a:pPr>
-              <a:buNone/>
-            </a:pPr>
-            <a:r>
-              <a:t>[자료 출처 / 낭독하지 않음]</a:t>
-            </a:r>
-          </a:p>
-          <a:p>
-            <a:pPr>
-              <a:buNone/>
-            </a:pPr>
-            <a:r>
-              <a:t>https://github.com/Jin-s-work/Travel-Agent</a:t>
-            </a:r>
-          </a:p>
-          <a:p>
-            <a:pPr>
-              <a:buNone/>
-            </a:pPr>
-            <a:r>
-              <a:t>최신 화면: docs/screenshots/*-v7.jpg, 2026-10-08 운영 서비스의 가상 도쿄 여행</a:t>
-            </a:r>
-          </a:p>
-          <a:p>
-            <a:pPr>
-              <a:buNone/>
-            </a:pPr>
-            <a:r>
-              <a:t>이전 메일·일정·사진 예시: docs/presentation/CREDITS.md, 2026-10-07 로컬 합성 화면</a:t>
-            </a:r>
-          </a:p>
-          <a:p>
-            <a:pPr>
-              <a:buNone/>
-            </a:pPr>
-            <a:r>
-              <a:t>추천 v5: docs/service-v3/MAIN_RECOMMENDATION_UX.md 및 src/recommendations/hybrid_v5.py</a:t>
-            </a:r>
-          </a:p>
-          <a:p>
-            <a:pPr>
-              <a:buNone/>
-            </a:pPr>
-            <a:r>
-              <a:t>기존 v4 합성 평가: docs/service-v4/reports/hybrid-v4-benchmark.md. v5 결과가 아님.</a:t>
-            </a:r>
-          </a:p>
-          <a:p>
-            <a:pPr>
-              <a:buNone/>
-            </a:pPr>
-            <a:r>
-              <a:t>엄격 현지어 리뷰 추천 OFF. 실제 사용자 만족도 미측정. 100개 도시 입력과 자료 수준은 다름.</a:t>
-            </a:r>
-          </a:p>
-          <a:p>
-            <a:pPr>
-              <a:buNone/>
-            </a:pPr>
-            <a:r>
-              <a:t>사진: Javier Lastras, CC BY 2.0 https://commons.wikimedia.org/wiki/File:Barra_de_Casa_Lucio_(4245090907).jpg</a:t>
-            </a:r>
-          </a:p>
-          <a:p>
-            <a:pPr>
-              <a:buNone/>
-            </a:pPr>
-            <a:r>
-              <a:t>사진: Tamorlan, CC BY-SA 3.0 https://commons.wikimedia.org/wiki/File:Gallina_en_Pepitoria_(Ciriaco).JPG</a:t>
-            </a:r>
-          </a:p>
-          <a:p>
-            <a:pPr>
-              <a:buNone/>
-            </a:pPr>
-            <a:r>
-              <a:t>장소 데이터: OpenStreetMap 기여자 https://www.openstreetmap.org/copyright, Photon https://photon.komoot.io/, GeoNames https://www.geonames.org/</a:t>
-            </a:r>
-          </a:p>
-          <a:p>
-            <a:pPr>
-              <a:buNone/>
-            </a:pPr>
-            <a:r>
-              <a:t>영상은 실제 캡처의 편집본으로 처리 시간이나 클릭을 재현하지 않음.</a:t>
-            </a:r>
-          </a:p>
-        </p:txBody>
-      </p:sp>
-    </p:spTree>
-  </p:cSld>
-  <p:clrMapOvr>
-    <a:masterClrMapping/>
-  </p:clrMapOvr>
-</p:notes>
+<ns0:notes xmlns:ns0="http://schemas.openxmlformats.org/presentationml/2006/main" xmlns:ns1="http://schemas.openxmlformats.org/drawingml/2006/main" showMasterSp="1" showMasterPhAnim="1">
+  <ns0:cSld>
+    <ns0:spTree>
+      <ns0:nvGrpSpPr>
+        <ns0:cNvPr id="1" name=""/>
+        <ns0:cNvGrpSpPr/>
+        <ns0:nvPr/>
+      </ns0:nvGrpSpPr>
+      <ns0:grpSpPr>
+        <ns1:xfrm>
+          <ns1:off x="0" y="0"/>
+          <ns1:ext cx="0" cy="0"/>
+          <ns1:chOff x="0" y="0"/>
+          <ns1:chExt cx="0" cy="0"/>
+        </ns1:xfrm>
+      </ns0:grpSpPr>
+      <ns0:sp>
+        <ns0:nvSpPr>
+          <ns0:cNvPr id="109" name="Shape 109"/>
+          <ns0:cNvSpPr/>
+          <ns0:nvPr>
+            <ns0:ph type="sldImg"/>
+          </ns0:nvPr>
+        </ns0:nvSpPr>
+        <ns0:spPr>
+          <ns1:prstGeom prst="rect">
+            <ns1:avLst/>
+          </ns1:prstGeom>
+        </ns0:spPr>
+        <ns0:txBody>
+          <ns1:bodyPr/>
+          <ns1:lstStyle/>
+          <ns1:p>
+            <ns1:pPr/>
+          </ns1:p>
+        </ns0:txBody>
+      </ns0:sp>
+      <ns0:sp>
+        <ns0:nvSpPr>
+          <ns0:cNvPr id="110" name="Shape 110"/>
+          <ns0:cNvSpPr/>
+          <ns0:nvPr>
+            <ns0:ph type="body" sz="quarter" idx="1"/>
+          </ns0:nvPr>
+        </ns0:nvSpPr>
+        <ns0:spPr>
+          <ns1:prstGeom prst="rect">
+            <ns1:avLst/>
+          </ns1:prstGeom>
+        </ns0:spPr>
+        <ns0:txBody>
+          <ns1:bodyPr/>
+          <ns1:lstStyle/>
+          <ns1:p>
+            <ns1:pPr>
+              <ns1:buNone/>
+            </ns1:pPr>
+            <ns1:r>
+              <ns1:t/>
+            </ns1:r>
+          </ns1:p>
+          <ns1:p>
+            <ns1:pPr>
+              <ns1:buNone/>
+            </ns1:pPr>
+            <ns1:r>
+              <ns1:t/>
+            </ns1:r>
+          </ns1:p>
+          <ns1:p>
+            <ns1:pPr>
+              <ns1:buNone/>
+            </ns1:pPr>
+            <ns1:r>
+              <ns1:t/>
+            </ns1:r>
+          </ns1:p>
+          <ns1:p>
+            <ns1:pPr>
+              <ns1:buNone/>
+            </ns1:pPr>
+            <ns1:r>
+              <ns1:t/>
+            </ns1:r>
+          </ns1:p>
+          <ns1:p>
+            <ns1:pPr>
+              <ns1:buNone/>
+            </ns1:pPr>
+            <ns1:r>
+              <ns1:t/>
+            </ns1:r>
+          </ns1:p>
+          <ns1:p>
+            <ns1:pPr>
+              <ns1:buNone/>
+            </ns1:pPr>
+            <ns1:r>
+              <ns1:t/>
+            </ns1:r>
+          </ns1:p>
+          <ns1:p>
+            <ns1:pPr>
+              <ns1:buNone/>
+            </ns1:pPr>
+            <ns1:r>
+              <ns1:t/>
+            </ns1:r>
+          </ns1:p>
+          <ns1:p>
+            <ns1:pPr>
+              <ns1:buNone/>
+            </ns1:pPr>
+            <ns1:r>
+              <ns1:t/>
+            </ns1:r>
+          </ns1:p>
+          <ns1:p>
+            <ns1:pPr>
+              <ns1:buNone/>
+            </ns1:pPr>
+            <ns1:r>
+              <ns1:t/>
+            </ns1:r>
+          </ns1:p>
+          <ns1:p>
+            <ns1:pPr>
+              <ns1:buNone/>
+            </ns1:pPr>
+            <ns1:r>
+              <ns1:t/>
+            </ns1:r>
+          </ns1:p>
+          <ns1:p>
+            <ns1:pPr>
+              <ns1:buNone/>
+            </ns1:pPr>
+            <ns1:r>
+              <ns1:t/>
+            </ns1:r>
+          </ns1:p>
+          <ns1:p>
+            <ns1:pPr>
+              <ns1:buNone/>
+            </ns1:pPr>
+            <ns1:r>
+              <ns1:t/>
+            </ns1:r>
+          </ns1:p>
+          <ns1:p>
+            <ns1:pPr>
+              <ns1:buNone/>
+            </ns1:pPr>
+            <ns1:r>
+              <ns1:t/>
+            </ns1:r>
+          </ns1:p>
+          <ns1:p>
+            <ns1:pPr>
+              <ns1:buNone/>
+            </ns1:pPr>
+            <ns1:r>
+              <ns1:t/>
+            </ns1:r>
+          </ns1:p>
+          <ns1:p>
+            <ns1:pPr>
+              <ns1:buNone/>
+            </ns1:pPr>
+            <ns1:r>
+              <ns1:t/>
+            </ns1:r>
+          </ns1:p>
+          <ns1:p>
+            <ns1:pPr>
+              <ns1:buNone/>
+            </ns1:pPr>
+            <ns1:r>
+              <ns1:t/>
+            </ns1:r>
+          </ns1:p>
+          <ns1:p>
+            <ns1:pPr>
+              <ns1:buNone/>
+            </ns1:pPr>
+            <ns1:r>
+              <ns1:t/>
+            </ns1:r>
+          </ns1:p>
+          <ns1:p>
+            <ns1:pPr>
+              <ns1:buNone/>
+            </ns1:pPr>
+            <ns1:r>
+              <ns1:t/>
+            </ns1:r>
+          </ns1:p>
+          <ns1:p>
+            <ns1:pPr>
+              <ns1:buNone/>
+            </ns1:pPr>
+            <ns1:r>
+              <ns1:t/>
+            </ns1:r>
+          </ns1:p>
+          <ns1:p>
+            <ns1:pPr>
+              <ns1:buNone/>
+            </ns1:pPr>
+            <ns1:r>
+              <ns1:t/>
+            </ns1:r>
+          </ns1:p>
+          <ns1:p>
+            <ns1:pPr>
+              <ns1:buNone/>
+            </ns1:pPr>
+            <ns1:r>
+              <ns1:t/>
+            </ns1:r>
+          </ns1:p>
+        </ns0:txBody>
+      </ns0:sp>
+    </ns0:spTree>
+  </ns0:cSld>
+  <ns0:clrMapOvr>
+    <ns1:masterClrMapping/>
+  </ns0:clrMapOvr>
+</ns0:notes>
 </file>
 
 <file path=ppt/notesSlides/notesSlide5.xml><?xml version="1.0" encoding="utf-8"?>
-<p:notes xmlns:a="http://schemas.openxmlformats.org/drawingml/2006/main" xmlns:r="http://schemas.openxmlformats.org/officeDocument/2006/relationships" xmlns:p="http://schemas.openxmlformats.org/presentationml/2006/main" xmlns:m="http://schemas.openxmlformats.org/officeDocument/2006/math" xmlns:a14="http://schemas.microsoft.com/office/drawing/2010/main" showMasterSp="1" showMasterPhAnim="1">
-  <p:cSld>
-    <p:spTree>
-      <p:nvGrpSpPr>
-        <p:cNvPr id="1" name=""/>
-        <p:cNvGrpSpPr/>
-        <p:nvPr/>
-      </p:nvGrpSpPr>
-      <p:grpSpPr>
-        <a:xfrm>
-          <a:off x="0" y="0"/>
-          <a:ext cx="0" cy="0"/>
-          <a:chOff x="0" y="0"/>
-          <a:chExt cx="0" cy="0"/>
-        </a:xfrm>
-      </p:grpSpPr>
-      <p:sp>
-        <p:nvSpPr>
-          <p:cNvPr id="119" name="Shape 119"/>
-          <p:cNvSpPr/>
-          <p:nvPr>
-            <p:ph type="sldImg"/>
-          </p:nvPr>
-        </p:nvSpPr>
-        <p:spPr>
-          <a:prstGeom prst="rect">
-            <a:avLst/>
-          </a:prstGeom>
-        </p:spPr>
-        <p:txBody>
-          <a:bodyPr/>
-          <a:lstStyle/>
-          <a:p>
-            <a:pPr/>
-          </a:p>
-        </p:txBody>
-      </p:sp>
-      <p:sp>
-        <p:nvSpPr>
-          <p:cNvPr id="120" name="Shape 120"/>
-          <p:cNvSpPr/>
-          <p:nvPr>
-            <p:ph type="body" sz="quarter" idx="1"/>
-          </p:nvPr>
-        </p:nvSpPr>
-        <p:spPr>
-          <a:prstGeom prst="rect">
-            <a:avLst/>
-          </a:prstGeom>
-        </p:spPr>
-        <p:txBody>
-          <a:bodyPr/>
-          <a:lstStyle/>
-          <a:p>
-            <a:pPr>
-              <a:buNone/>
-            </a:pPr>
-            <a:r>
-              <a:t>[목표 40초]</a:t>
-            </a:r>
-          </a:p>
-          <a:p>
-            <a:pPr>
-              <a:buNone/>
-            </a:pPr>
-            <a:r>
-              <a:t/>
-            </a:r>
-          </a:p>
-          <a:p>
-            <a:pPr>
-              <a:buNone/>
-            </a:pPr>
-            <a:r>
-              <a:t>AI 질문은 이제 더보기를 찾지 않아도 메인에서 바로 시작할 수 있습니다. 예시 질문을 고르거나 직접 입력하면 대화 화면으로 이어집니다.</a:t>
-            </a:r>
-          </a:p>
-          <a:p>
-            <a:pPr>
-              <a:buNone/>
-            </a:pPr>
-            <a:r>
-              <a:t/>
-            </a:r>
-          </a:p>
-          <a:p>
-            <a:pPr>
-              <a:buNone/>
-            </a:pPr>
-            <a:r>
-              <a:t>왼쪽은 첫날 예약을 모두 알려 달라고 물은 결과입니다. 테스트용 수동 예약 한 건을 정확히 가져왔고, 오른쪽에서는 직접 입력한 예약이라는 출처를 보여줍니다. 이 예약에는 메일 원문이 없다는 점도 표시합니다.</a:t>
-            </a:r>
-          </a:p>
-          <a:p>
-            <a:pPr>
-              <a:buNone/>
-            </a:pPr>
-            <a:r>
-              <a:t/>
-            </a:r>
-          </a:p>
-          <a:p>
-            <a:pPr>
-              <a:buNone/>
-            </a:pPr>
-            <a:r>
-              <a:t>날짜별 질문은 검색 점수가 높은 몇 개를 고르는 대신 저장된 예약을 날짜 범위로 모두 조회합니다. 환불 규정처럼 본문이 필요한 질문은 관련 메일을 검색해 답하고 원문을 연결합니다. AI가 답해 주는 것과 함께, 제가 다시 확인할 수 있는 근거를 남기는 데 신경 썼습니다.</a:t>
-            </a:r>
-          </a:p>
-          <a:p>
-            <a:pPr>
-              <a:buNone/>
-            </a:pPr>
-            <a:r>
-              <a:t/>
-            </a:r>
-          </a:p>
-          <a:p>
-            <a:pPr>
-              <a:buNone/>
-            </a:pPr>
-            <a:r>
-              <a:t>화면 안내: 최신 답변과 직접 입력 출처를 짚고, 메일 원문 질문과 구분합니다.</a:t>
-            </a:r>
-          </a:p>
-          <a:p>
-            <a:pPr>
-              <a:buNone/>
-            </a:pPr>
-            <a:r>
-              <a:t/>
-            </a:r>
-          </a:p>
-          <a:p>
-            <a:pPr>
-              <a:buNone/>
-            </a:pPr>
-            <a:r>
-              <a:t>[자료 출처 / 낭독하지 않음]</a:t>
-            </a:r>
-          </a:p>
-          <a:p>
-            <a:pPr>
-              <a:buNone/>
-            </a:pPr>
-            <a:r>
-              <a:t>https://github.com/Jin-s-work/Travel-Agent</a:t>
-            </a:r>
-          </a:p>
-          <a:p>
-            <a:pPr>
-              <a:buNone/>
-            </a:pPr>
-            <a:r>
-              <a:t>최신 화면: docs/screenshots/*-v7.jpg, 2026-10-08 운영 서비스의 가상 도쿄 여행</a:t>
-            </a:r>
-          </a:p>
-          <a:p>
-            <a:pPr>
-              <a:buNone/>
-            </a:pPr>
-            <a:r>
-              <a:t>이전 메일·일정·사진 예시: docs/presentation/CREDITS.md, 2026-10-07 로컬 합성 화면</a:t>
-            </a:r>
-          </a:p>
-          <a:p>
-            <a:pPr>
-              <a:buNone/>
-            </a:pPr>
-            <a:r>
-              <a:t>추천 v5: docs/service-v3/MAIN_RECOMMENDATION_UX.md 및 src/recommendations/hybrid_v5.py</a:t>
-            </a:r>
-          </a:p>
-          <a:p>
-            <a:pPr>
-              <a:buNone/>
-            </a:pPr>
-            <a:r>
-              <a:t>기존 v4 합성 평가: docs/service-v4/reports/hybrid-v4-benchmark.md. v5 결과가 아님.</a:t>
-            </a:r>
-          </a:p>
-          <a:p>
-            <a:pPr>
-              <a:buNone/>
-            </a:pPr>
-            <a:r>
-              <a:t>엄격 현지어 리뷰 추천 OFF. 실제 사용자 만족도 미측정. 100개 도시 입력과 자료 수준은 다름.</a:t>
-            </a:r>
-          </a:p>
-          <a:p>
-            <a:pPr>
-              <a:buNone/>
-            </a:pPr>
-            <a:r>
-              <a:t>사진: Javier Lastras, CC BY 2.0 https://commons.wikimedia.org/wiki/File:Barra_de_Casa_Lucio_(4245090907).jpg</a:t>
-            </a:r>
-          </a:p>
-          <a:p>
-            <a:pPr>
-              <a:buNone/>
-            </a:pPr>
-            <a:r>
-              <a:t>사진: Tamorlan, CC BY-SA 3.0 https://commons.wikimedia.org/wiki/File:Gallina_en_Pepitoria_(Ciriaco).JPG</a:t>
-            </a:r>
-          </a:p>
-          <a:p>
-            <a:pPr>
-              <a:buNone/>
-            </a:pPr>
-            <a:r>
-              <a:t>장소 데이터: OpenStreetMap 기여자 https://www.openstreetmap.org/copyright, Photon https://photon.komoot.io/, GeoNames https://www.geonames.org/</a:t>
-            </a:r>
-          </a:p>
-          <a:p>
-            <a:pPr>
-              <a:buNone/>
-            </a:pPr>
-            <a:r>
-              <a:t>영상은 실제 캡처의 편집본으로 처리 시간이나 클릭을 재현하지 않음.</a:t>
-            </a:r>
-          </a:p>
-        </p:txBody>
-      </p:sp>
-    </p:spTree>
-  </p:cSld>
-  <p:clrMapOvr>
-    <a:masterClrMapping/>
-  </p:clrMapOvr>
-</p:notes>
+<ns0:notes xmlns:ns0="http://schemas.openxmlformats.org/presentationml/2006/main" xmlns:ns1="http://schemas.openxmlformats.org/drawingml/2006/main" showMasterSp="1" showMasterPhAnim="1">
+  <ns0:cSld>
+    <ns0:spTree>
+      <ns0:nvGrpSpPr>
+        <ns0:cNvPr id="1" name=""/>
+        <ns0:cNvGrpSpPr/>
+        <ns0:nvPr/>
+      </ns0:nvGrpSpPr>
+      <ns0:grpSpPr>
+        <ns1:xfrm>
+          <ns1:off x="0" y="0"/>
+          <ns1:ext cx="0" cy="0"/>
+          <ns1:chOff x="0" y="0"/>
+          <ns1:chExt cx="0" cy="0"/>
+        </ns1:xfrm>
+      </ns0:grpSpPr>
+      <ns0:sp>
+        <ns0:nvSpPr>
+          <ns0:cNvPr id="119" name="Shape 119"/>
+          <ns0:cNvSpPr/>
+          <ns0:nvPr>
+            <ns0:ph type="sldImg"/>
+          </ns0:nvPr>
+        </ns0:nvSpPr>
+        <ns0:spPr>
+          <ns1:prstGeom prst="rect">
+            <ns1:avLst/>
+          </ns1:prstGeom>
+        </ns0:spPr>
+        <ns0:txBody>
+          <ns1:bodyPr/>
+          <ns1:lstStyle/>
+          <ns1:p>
+            <ns1:pPr/>
+          </ns1:p>
+        </ns0:txBody>
+      </ns0:sp>
+      <ns0:sp>
+        <ns0:nvSpPr>
+          <ns0:cNvPr id="120" name="Shape 120"/>
+          <ns0:cNvSpPr/>
+          <ns0:nvPr>
+            <ns0:ph type="body" sz="quarter" idx="1"/>
+          </ns0:nvPr>
+        </ns0:nvSpPr>
+        <ns0:spPr>
+          <ns1:prstGeom prst="rect">
+            <ns1:avLst/>
+          </ns1:prstGeom>
+        </ns0:spPr>
+        <ns0:txBody>
+          <ns1:bodyPr/>
+          <ns1:lstStyle/>
+          <ns1:p>
+            <ns1:pPr>
+              <ns1:buNone/>
+            </ns1:pPr>
+            <ns1:r>
+              <ns1:t/>
+            </ns1:r>
+          </ns1:p>
+          <ns1:p>
+            <ns1:pPr>
+              <ns1:buNone/>
+            </ns1:pPr>
+            <ns1:r>
+              <ns1:t/>
+            </ns1:r>
+          </ns1:p>
+          <ns1:p>
+            <ns1:pPr>
+              <ns1:buNone/>
+            </ns1:pPr>
+            <ns1:r>
+              <ns1:t/>
+            </ns1:r>
+          </ns1:p>
+          <ns1:p>
+            <ns1:pPr>
+              <ns1:buNone/>
+            </ns1:pPr>
+            <ns1:r>
+              <ns1:t/>
+            </ns1:r>
+          </ns1:p>
+          <ns1:p>
+            <ns1:pPr>
+              <ns1:buNone/>
+            </ns1:pPr>
+            <ns1:r>
+              <ns1:t/>
+            </ns1:r>
+          </ns1:p>
+          <ns1:p>
+            <ns1:pPr>
+              <ns1:buNone/>
+            </ns1:pPr>
+            <ns1:r>
+              <ns1:t/>
+            </ns1:r>
+          </ns1:p>
+          <ns1:p>
+            <ns1:pPr>
+              <ns1:buNone/>
+            </ns1:pPr>
+            <ns1:r>
+              <ns1:t/>
+            </ns1:r>
+          </ns1:p>
+          <ns1:p>
+            <ns1:pPr>
+              <ns1:buNone/>
+            </ns1:pPr>
+            <ns1:r>
+              <ns1:t/>
+            </ns1:r>
+          </ns1:p>
+          <ns1:p>
+            <ns1:pPr>
+              <ns1:buNone/>
+            </ns1:pPr>
+            <ns1:r>
+              <ns1:t/>
+            </ns1:r>
+          </ns1:p>
+          <ns1:p>
+            <ns1:pPr>
+              <ns1:buNone/>
+            </ns1:pPr>
+            <ns1:r>
+              <ns1:t/>
+            </ns1:r>
+          </ns1:p>
+          <ns1:p>
+            <ns1:pPr>
+              <ns1:buNone/>
+            </ns1:pPr>
+            <ns1:r>
+              <ns1:t/>
+            </ns1:r>
+          </ns1:p>
+          <ns1:p>
+            <ns1:pPr>
+              <ns1:buNone/>
+            </ns1:pPr>
+            <ns1:r>
+              <ns1:t/>
+            </ns1:r>
+          </ns1:p>
+          <ns1:p>
+            <ns1:pPr>
+              <ns1:buNone/>
+            </ns1:pPr>
+            <ns1:r>
+              <ns1:t/>
+            </ns1:r>
+          </ns1:p>
+          <ns1:p>
+            <ns1:pPr>
+              <ns1:buNone/>
+            </ns1:pPr>
+            <ns1:r>
+              <ns1:t/>
+            </ns1:r>
+          </ns1:p>
+          <ns1:p>
+            <ns1:pPr>
+              <ns1:buNone/>
+            </ns1:pPr>
+            <ns1:r>
+              <ns1:t/>
+            </ns1:r>
+          </ns1:p>
+          <ns1:p>
+            <ns1:pPr>
+              <ns1:buNone/>
+            </ns1:pPr>
+            <ns1:r>
+              <ns1:t/>
+            </ns1:r>
+          </ns1:p>
+          <ns1:p>
+            <ns1:pPr>
+              <ns1:buNone/>
+            </ns1:pPr>
+            <ns1:r>
+              <ns1:t/>
+            </ns1:r>
+          </ns1:p>
+          <ns1:p>
+            <ns1:pPr>
+              <ns1:buNone/>
+            </ns1:pPr>
+            <ns1:r>
+              <ns1:t/>
+            </ns1:r>
+          </ns1:p>
+          <ns1:p>
+            <ns1:pPr>
+              <ns1:buNone/>
+            </ns1:pPr>
+            <ns1:r>
+              <ns1:t/>
+            </ns1:r>
+          </ns1:p>
+          <ns1:p>
+            <ns1:pPr>
+              <ns1:buNone/>
+            </ns1:pPr>
+            <ns1:r>
+              <ns1:t/>
+            </ns1:r>
+          </ns1:p>
+          <ns1:p>
+            <ns1:pPr>
+              <ns1:buNone/>
+            </ns1:pPr>
+            <ns1:r>
+              <ns1:t/>
+            </ns1:r>
+          </ns1:p>
+        </ns0:txBody>
+      </ns0:sp>
+    </ns0:spTree>
+  </ns0:cSld>
+  <ns0:clrMapOvr>
+    <ns1:masterClrMapping/>
+  </ns0:clrMapOvr>
+</ns0:notes>
 </file>
 
 <file path=ppt/notesSlides/notesSlide6.xml><?xml version="1.0" encoding="utf-8"?>
-<p:notes xmlns:a="http://schemas.openxmlformats.org/drawingml/2006/main" xmlns:r="http://schemas.openxmlformats.org/officeDocument/2006/relationships" xmlns:p="http://schemas.openxmlformats.org/presentationml/2006/main" xmlns:m="http://schemas.openxmlformats.org/officeDocument/2006/math" xmlns:a14="http://schemas.microsoft.com/office/drawing/2010/main" showMasterSp="1" showMasterPhAnim="1">
-  <p:cSld>
-    <p:spTree>
-      <p:nvGrpSpPr>
-        <p:cNvPr id="1" name=""/>
-        <p:cNvGrpSpPr/>
-        <p:nvPr/>
-      </p:nvGrpSpPr>
-      <p:grpSpPr>
-        <a:xfrm>
-          <a:off x="0" y="0"/>
-          <a:ext cx="0" cy="0"/>
-          <a:chOff x="0" y="0"/>
-          <a:chExt cx="0" cy="0"/>
-        </a:xfrm>
-      </p:grpSpPr>
-      <p:sp>
-        <p:nvSpPr>
-          <p:cNvPr id="131" name="Shape 131"/>
-          <p:cNvSpPr/>
-          <p:nvPr>
-            <p:ph type="sldImg"/>
-          </p:nvPr>
-        </p:nvSpPr>
-        <p:spPr>
-          <a:prstGeom prst="rect">
-            <a:avLst/>
-          </a:prstGeom>
-        </p:spPr>
-        <p:txBody>
-          <a:bodyPr/>
-          <a:lstStyle/>
-          <a:p>
-            <a:pPr/>
-          </a:p>
-        </p:txBody>
-      </p:sp>
-      <p:sp>
-        <p:nvSpPr>
-          <p:cNvPr id="132" name="Shape 132"/>
-          <p:cNvSpPr/>
-          <p:nvPr>
-            <p:ph type="body" sz="quarter" idx="1"/>
-          </p:nvPr>
-        </p:nvSpPr>
-        <p:spPr>
-          <a:prstGeom prst="rect">
-            <a:avLst/>
-          </a:prstGeom>
-        </p:spPr>
-        <p:txBody>
-          <a:bodyPr/>
-          <a:lstStyle/>
-          <a:p>
-            <a:pPr>
-              <a:buNone/>
-            </a:pPr>
-            <a:r>
-              <a:t>[목표 40초]</a:t>
-            </a:r>
-          </a:p>
-          <a:p>
-            <a:pPr>
-              <a:buNone/>
-            </a:pPr>
-            <a:r>
-              <a:t/>
-            </a:r>
-          </a:p>
-          <a:p>
-            <a:pPr>
-              <a:buNone/>
-            </a:pPr>
-            <a:r>
-              <a:t>장소 추천에서는 여행에 입력한 날짜와 인원을 그대로 사용합니다. 음식점이나 카페를 고른 뒤, 더 필요한 경우에만 취향이나 예산을 바꾸도록 했습니다. 모든 카드에 반복되던 긴 확인 문구는 줄이고 상세 보기와 저장을 중심으로 정리했습니다.</a:t>
-            </a:r>
-          </a:p>
-          <a:p>
-            <a:pPr>
-              <a:buNone/>
-            </a:pPr>
-            <a:r>
-              <a:t/>
-            </a:r>
-          </a:p>
-          <a:p>
-            <a:pPr>
-              <a:buNone/>
-            </a:pPr>
-            <a:r>
-              <a:t>사진이 확보된 곳은 최대 세 장까지 볼 수 있습니다. 다만 무료 지도 자료에는 사진이 없는 식당이 많습니다. 이번에는 사진 출처 하나가 실패하면 다른 정상 출처까지 막히던 처리를 고쳤고, 파리 식당 한 곳의 실제 표시를 확인했습니다. 화면은 사진 기능을 보여주는 이전 마드리드 예시이고, 모든 식당의 사진이 나온다는 뜻은 아닙니다.</a:t>
-            </a:r>
-          </a:p>
-          <a:p>
-            <a:pPr>
-              <a:buNone/>
-            </a:pPr>
-            <a:r>
-              <a:t/>
-            </a:r>
-          </a:p>
-          <a:p>
-            <a:pPr>
-              <a:buNone/>
-            </a:pPr>
-            <a:r>
-              <a:t>숙소 좌표가 확인되면 숙소 기준으로 거리를 비교합니다. 출발점을 고르지 않았으면 도심 기준이라고 명시합니다. 마음에 드는 곳은 바로 저장하고 같은 조건으로 최대 세 곳을 비교할 수 있습니다.</a:t>
-            </a:r>
-          </a:p>
-          <a:p>
-            <a:pPr>
-              <a:buNone/>
-            </a:pPr>
-            <a:r>
-              <a:t/>
-            </a:r>
-          </a:p>
-          <a:p>
-            <a:pPr>
-              <a:buNone/>
-            </a:pPr>
-            <a:r>
-              <a:t>화면 안내: 사진이 있는 이전 마드리드 예시와 현재 무료 사진의 한계를 함께 설명합니다.</a:t>
-            </a:r>
-          </a:p>
-          <a:p>
-            <a:pPr>
-              <a:buNone/>
-            </a:pPr>
-            <a:r>
-              <a:t/>
-            </a:r>
-          </a:p>
-          <a:p>
-            <a:pPr>
-              <a:buNone/>
-            </a:pPr>
-            <a:r>
-              <a:t>[자료 출처 / 낭독하지 않음]</a:t>
-            </a:r>
-          </a:p>
-          <a:p>
-            <a:pPr>
-              <a:buNone/>
-            </a:pPr>
-            <a:r>
-              <a:t>https://github.com/Jin-s-work/Travel-Agent</a:t>
-            </a:r>
-          </a:p>
-          <a:p>
-            <a:pPr>
-              <a:buNone/>
-            </a:pPr>
-            <a:r>
-              <a:t>최신 화면: docs/screenshots/*-v7.jpg, 2026-10-08 운영 서비스의 가상 도쿄 여행</a:t>
-            </a:r>
-          </a:p>
-          <a:p>
-            <a:pPr>
-              <a:buNone/>
-            </a:pPr>
-            <a:r>
-              <a:t>이전 메일·일정·사진 예시: docs/presentation/CREDITS.md, 2026-10-07 로컬 합성 화면</a:t>
-            </a:r>
-          </a:p>
-          <a:p>
-            <a:pPr>
-              <a:buNone/>
-            </a:pPr>
-            <a:r>
-              <a:t>추천 v5: docs/service-v3/MAIN_RECOMMENDATION_UX.md 및 src/recommendations/hybrid_v5.py</a:t>
-            </a:r>
-          </a:p>
-          <a:p>
-            <a:pPr>
-              <a:buNone/>
-            </a:pPr>
-            <a:r>
-              <a:t>기존 v4 합성 평가: docs/service-v4/reports/hybrid-v4-benchmark.md. v5 결과가 아님.</a:t>
-            </a:r>
-          </a:p>
-          <a:p>
-            <a:pPr>
-              <a:buNone/>
-            </a:pPr>
-            <a:r>
-              <a:t>엄격 현지어 리뷰 추천 OFF. 실제 사용자 만족도 미측정. 100개 도시 입력과 자료 수준은 다름.</a:t>
-            </a:r>
-          </a:p>
-          <a:p>
-            <a:pPr>
-              <a:buNone/>
-            </a:pPr>
-            <a:r>
-              <a:t>사진: Javier Lastras, CC BY 2.0 https://commons.wikimedia.org/wiki/File:Barra_de_Casa_Lucio_(4245090907).jpg</a:t>
-            </a:r>
-          </a:p>
-          <a:p>
-            <a:pPr>
-              <a:buNone/>
-            </a:pPr>
-            <a:r>
-              <a:t>사진: Tamorlan, CC BY-SA 3.0 https://commons.wikimedia.org/wiki/File:Gallina_en_Pepitoria_(Ciriaco).JPG</a:t>
-            </a:r>
-          </a:p>
-          <a:p>
-            <a:pPr>
-              <a:buNone/>
-            </a:pPr>
-            <a:r>
-              <a:t>장소 데이터: OpenStreetMap 기여자 https://www.openstreetmap.org/copyright, Photon https://photon.komoot.io/, GeoNames https://www.geonames.org/</a:t>
-            </a:r>
-          </a:p>
-          <a:p>
-            <a:pPr>
-              <a:buNone/>
-            </a:pPr>
-            <a:r>
-              <a:t>영상은 실제 캡처의 편집본으로 처리 시간이나 클릭을 재현하지 않음.</a:t>
-            </a:r>
-          </a:p>
-        </p:txBody>
-      </p:sp>
-    </p:spTree>
-  </p:cSld>
-  <p:clrMapOvr>
-    <a:masterClrMapping/>
-  </p:clrMapOvr>
-</p:notes>
+<ns0:notes xmlns:ns0="http://schemas.openxmlformats.org/presentationml/2006/main" xmlns:ns1="http://schemas.openxmlformats.org/drawingml/2006/main" showMasterSp="1" showMasterPhAnim="1">
+  <ns0:cSld>
+    <ns0:spTree>
+      <ns0:nvGrpSpPr>
+        <ns0:cNvPr id="1" name=""/>
+        <ns0:cNvGrpSpPr/>
+        <ns0:nvPr/>
+      </ns0:nvGrpSpPr>
+      <ns0:grpSpPr>
+        <ns1:xfrm>
+          <ns1:off x="0" y="0"/>
+          <ns1:ext cx="0" cy="0"/>
+          <ns1:chOff x="0" y="0"/>
+          <ns1:chExt cx="0" cy="0"/>
+        </ns1:xfrm>
+      </ns0:grpSpPr>
+      <ns0:sp>
+        <ns0:nvSpPr>
+          <ns0:cNvPr id="131" name="Shape 131"/>
+          <ns0:cNvSpPr/>
+          <ns0:nvPr>
+            <ns0:ph type="sldImg"/>
+          </ns0:nvPr>
+        </ns0:nvSpPr>
+        <ns0:spPr>
+          <ns1:prstGeom prst="rect">
+            <ns1:avLst/>
+          </ns1:prstGeom>
+        </ns0:spPr>
+        <ns0:txBody>
+          <ns1:bodyPr/>
+          <ns1:lstStyle/>
+          <ns1:p>
+            <ns1:pPr/>
+          </ns1:p>
+        </ns0:txBody>
+      </ns0:sp>
+      <ns0:sp>
+        <ns0:nvSpPr>
+          <ns0:cNvPr id="132" name="Shape 132"/>
+          <ns0:cNvSpPr/>
+          <ns0:nvPr>
+            <ns0:ph type="body" sz="quarter" idx="1"/>
+          </ns0:nvPr>
+        </ns0:nvSpPr>
+        <ns0:spPr>
+          <ns1:prstGeom prst="rect">
+            <ns1:avLst/>
+          </ns1:prstGeom>
+        </ns0:spPr>
+        <ns0:txBody>
+          <ns1:bodyPr/>
+          <ns1:lstStyle/>
+          <ns1:p>
+            <ns1:pPr>
+              <ns1:buNone/>
+            </ns1:pPr>
+            <ns1:r>
+              <ns1:t/>
+            </ns1:r>
+          </ns1:p>
+          <ns1:p>
+            <ns1:pPr>
+              <ns1:buNone/>
+            </ns1:pPr>
+            <ns1:r>
+              <ns1:t/>
+            </ns1:r>
+          </ns1:p>
+          <ns1:p>
+            <ns1:pPr>
+              <ns1:buNone/>
+            </ns1:pPr>
+            <ns1:r>
+              <ns1:t/>
+            </ns1:r>
+          </ns1:p>
+          <ns1:p>
+            <ns1:pPr>
+              <ns1:buNone/>
+            </ns1:pPr>
+            <ns1:r>
+              <ns1:t/>
+            </ns1:r>
+          </ns1:p>
+          <ns1:p>
+            <ns1:pPr>
+              <ns1:buNone/>
+            </ns1:pPr>
+            <ns1:r>
+              <ns1:t/>
+            </ns1:r>
+          </ns1:p>
+          <ns1:p>
+            <ns1:pPr>
+              <ns1:buNone/>
+            </ns1:pPr>
+            <ns1:r>
+              <ns1:t/>
+            </ns1:r>
+          </ns1:p>
+          <ns1:p>
+            <ns1:pPr>
+              <ns1:buNone/>
+            </ns1:pPr>
+            <ns1:r>
+              <ns1:t/>
+            </ns1:r>
+          </ns1:p>
+          <ns1:p>
+            <ns1:pPr>
+              <ns1:buNone/>
+            </ns1:pPr>
+            <ns1:r>
+              <ns1:t/>
+            </ns1:r>
+          </ns1:p>
+          <ns1:p>
+            <ns1:pPr>
+              <ns1:buNone/>
+            </ns1:pPr>
+            <ns1:r>
+              <ns1:t/>
+            </ns1:r>
+          </ns1:p>
+          <ns1:p>
+            <ns1:pPr>
+              <ns1:buNone/>
+            </ns1:pPr>
+            <ns1:r>
+              <ns1:t/>
+            </ns1:r>
+          </ns1:p>
+          <ns1:p>
+            <ns1:pPr>
+              <ns1:buNone/>
+            </ns1:pPr>
+            <ns1:r>
+              <ns1:t/>
+            </ns1:r>
+          </ns1:p>
+          <ns1:p>
+            <ns1:pPr>
+              <ns1:buNone/>
+            </ns1:pPr>
+            <ns1:r>
+              <ns1:t/>
+            </ns1:r>
+          </ns1:p>
+          <ns1:p>
+            <ns1:pPr>
+              <ns1:buNone/>
+            </ns1:pPr>
+            <ns1:r>
+              <ns1:t/>
+            </ns1:r>
+          </ns1:p>
+          <ns1:p>
+            <ns1:pPr>
+              <ns1:buNone/>
+            </ns1:pPr>
+            <ns1:r>
+              <ns1:t/>
+            </ns1:r>
+          </ns1:p>
+          <ns1:p>
+            <ns1:pPr>
+              <ns1:buNone/>
+            </ns1:pPr>
+            <ns1:r>
+              <ns1:t/>
+            </ns1:r>
+          </ns1:p>
+          <ns1:p>
+            <ns1:pPr>
+              <ns1:buNone/>
+            </ns1:pPr>
+            <ns1:r>
+              <ns1:t/>
+            </ns1:r>
+          </ns1:p>
+          <ns1:p>
+            <ns1:pPr>
+              <ns1:buNone/>
+            </ns1:pPr>
+            <ns1:r>
+              <ns1:t/>
+            </ns1:r>
+          </ns1:p>
+          <ns1:p>
+            <ns1:pPr>
+              <ns1:buNone/>
+            </ns1:pPr>
+            <ns1:r>
+              <ns1:t/>
+            </ns1:r>
+          </ns1:p>
+          <ns1:p>
+            <ns1:pPr>
+              <ns1:buNone/>
+            </ns1:pPr>
+            <ns1:r>
+              <ns1:t/>
+            </ns1:r>
+          </ns1:p>
+          <ns1:p>
+            <ns1:pPr>
+              <ns1:buNone/>
+            </ns1:pPr>
+            <ns1:r>
+              <ns1:t/>
+            </ns1:r>
+          </ns1:p>
+          <ns1:p>
+            <ns1:pPr>
+              <ns1:buNone/>
+            </ns1:pPr>
+            <ns1:r>
+              <ns1:t/>
+            </ns1:r>
+          </ns1:p>
+        </ns0:txBody>
+      </ns0:sp>
+    </ns0:spTree>
+  </ns0:cSld>
+  <ns0:clrMapOvr>
+    <ns1:masterClrMapping/>
+  </ns0:clrMapOvr>
+</ns0:notes>
 </file>
 
 <file path=ppt/notesSlides/notesSlide7.xml><?xml version="1.0" encoding="utf-8"?>
-<p:notes xmlns:a="http://schemas.openxmlformats.org/drawingml/2006/main" xmlns:r="http://schemas.openxmlformats.org/officeDocument/2006/relationships" xmlns:p="http://schemas.openxmlformats.org/presentationml/2006/main" xmlns:m="http://schemas.openxmlformats.org/officeDocument/2006/math" xmlns:a14="http://schemas.microsoft.com/office/drawing/2010/main" showMasterSp="1" showMasterPhAnim="1">
-  <p:cSld>
-    <p:spTree>
-      <p:nvGrpSpPr>
-        <p:cNvPr id="1" name=""/>
-        <p:cNvGrpSpPr/>
-        <p:nvPr/>
-      </p:nvGrpSpPr>
-      <p:grpSpPr>
-        <a:xfrm>
-          <a:off x="0" y="0"/>
-          <a:ext cx="0" cy="0"/>
-          <a:chOff x="0" y="0"/>
-          <a:chExt cx="0" cy="0"/>
-        </a:xfrm>
-      </p:grpSpPr>
-      <p:sp>
-        <p:nvSpPr>
-          <p:cNvPr id="143" name="Shape 143"/>
-          <p:cNvSpPr/>
-          <p:nvPr>
-            <p:ph type="sldImg"/>
-          </p:nvPr>
-        </p:nvSpPr>
-        <p:spPr>
-          <a:prstGeom prst="rect">
-            <a:avLst/>
-          </a:prstGeom>
-        </p:spPr>
-        <p:txBody>
-          <a:bodyPr/>
-          <a:lstStyle/>
-          <a:p>
-            <a:pPr/>
-          </a:p>
-        </p:txBody>
-      </p:sp>
-      <p:sp>
-        <p:nvSpPr>
-          <p:cNvPr id="144" name="Shape 144"/>
-          <p:cNvSpPr/>
-          <p:nvPr>
-            <p:ph type="body" sz="quarter" idx="1"/>
-          </p:nvPr>
-        </p:nvSpPr>
-        <p:spPr>
-          <a:prstGeom prst="rect">
-            <a:avLst/>
-          </a:prstGeom>
-        </p:spPr>
-        <p:txBody>
-          <a:bodyPr/>
-          <a:lstStyle/>
-          <a:p>
-            <a:pPr>
-              <a:buNone/>
-            </a:pPr>
-            <a:r>
-              <a:t>[목표 50초]</a:t>
-            </a:r>
-          </a:p>
-          <a:p>
-            <a:pPr>
-              <a:buNone/>
-            </a:pPr>
-            <a:r>
-              <a:t/>
-            </a:r>
-          </a:p>
-          <a:p>
-            <a:pPr>
-              <a:buNone/>
-            </a:pPr>
-            <a:r>
-              <a:t>추천은 두 가지 방향으로 나눴습니다. 하나는 현지 탐색입니다. 제가 특히 해보고 싶었던 기능은 현지어 원문 리뷰가 충분하고 한국어 리뷰가 적게 관측된 곳을 찾아보는 것이었습니다. 직접 외국어 리뷰를 하나씩 살펴보는 수고를 덜고 싶었습니다.</a:t>
-            </a:r>
-          </a:p>
-          <a:p>
-            <a:pPr>
-              <a:buNone/>
-            </a:pPr>
-            <a:r>
-              <a:t/>
-            </a:r>
-          </a:p>
-          <a:p>
-            <a:pPr>
-              <a:buNone/>
-            </a:pPr>
-            <a:r>
-              <a:t>다른 하나는 유명한 곳입니다. 여행지에 가면 꼭 가보고 싶은 대표 명소나 잘 알려진 식당도 있으니까요. 이쪽은 공식 소개 자료나 같은 플랫폼의 평가 규모처럼 유명함을 설명할 수 있는 근거를 따로 봅니다.</a:t>
-            </a:r>
-          </a:p>
-          <a:p>
-            <a:pPr>
-              <a:buNone/>
-            </a:pPr>
-            <a:r>
-              <a:t/>
-            </a:r>
-          </a:p>
-          <a:p>
-            <a:pPr>
-              <a:buNone/>
-            </a:pPr>
-            <a:r>
-              <a:t>현지어로 리뷰를 썼다고 현지 주민이라고 단정할 수는 없습니다. 그래서 관측한 리뷰의 언어 구성으로 설명하고, 언어를 모르는 리뷰도 함께 계산하도록 했습니다. 엄격한 현지어 추천은 실제 데이터 이용 범위와 언어 품질 검증을 마친 뒤 켤 계획입니다. 지금은 꺼 둔 상태입니다.</a:t>
-            </a:r>
-          </a:p>
-          <a:p>
-            <a:pPr>
-              <a:buNone/>
-            </a:pPr>
-            <a:r>
-              <a:t/>
-            </a:r>
-          </a:p>
-          <a:p>
-            <a:pPr>
-              <a:buNone/>
-            </a:pPr>
-            <a:r>
-              <a:t>화면 안내: 현지 탐색과 유명한 곳을 비교한 뒤 하단의 개발 상태를 설명합니다.</a:t>
-            </a:r>
-          </a:p>
-          <a:p>
-            <a:pPr>
-              <a:buNone/>
-            </a:pPr>
-            <a:r>
-              <a:t/>
-            </a:r>
-          </a:p>
-          <a:p>
-            <a:pPr>
-              <a:buNone/>
-            </a:pPr>
-            <a:r>
-              <a:t>[자료 출처 / 낭독하지 않음]</a:t>
-            </a:r>
-          </a:p>
-          <a:p>
-            <a:pPr>
-              <a:buNone/>
-            </a:pPr>
-            <a:r>
-              <a:t>https://github.com/Jin-s-work/Travel-Agent</a:t>
-            </a:r>
-          </a:p>
-          <a:p>
-            <a:pPr>
-              <a:buNone/>
-            </a:pPr>
-            <a:r>
-              <a:t>최신 화면: docs/screenshots/*-v7.jpg, 2026-10-08 운영 서비스의 가상 도쿄 여행</a:t>
-            </a:r>
-          </a:p>
-          <a:p>
-            <a:pPr>
-              <a:buNone/>
-            </a:pPr>
-            <a:r>
-              <a:t>이전 메일·일정·사진 예시: docs/presentation/CREDITS.md, 2026-10-07 로컬 합성 화면</a:t>
-            </a:r>
-          </a:p>
-          <a:p>
-            <a:pPr>
-              <a:buNone/>
-            </a:pPr>
-            <a:r>
-              <a:t>추천 v5: docs/service-v3/MAIN_RECOMMENDATION_UX.md 및 src/recommendations/hybrid_v5.py</a:t>
-            </a:r>
-          </a:p>
-          <a:p>
-            <a:pPr>
-              <a:buNone/>
-            </a:pPr>
-            <a:r>
-              <a:t>기존 v4 합성 평가: docs/service-v4/reports/hybrid-v4-benchmark.md. v5 결과가 아님.</a:t>
-            </a:r>
-          </a:p>
-          <a:p>
-            <a:pPr>
-              <a:buNone/>
-            </a:pPr>
-            <a:r>
-              <a:t>엄격 현지어 리뷰 추천 OFF. 실제 사용자 만족도 미측정. 100개 도시 입력과 자료 수준은 다름.</a:t>
-            </a:r>
-          </a:p>
-          <a:p>
-            <a:pPr>
-              <a:buNone/>
-            </a:pPr>
-            <a:r>
-              <a:t>사진: Javier Lastras, CC BY 2.0 https://commons.wikimedia.org/wiki/File:Barra_de_Casa_Lucio_(4245090907).jpg</a:t>
-            </a:r>
-          </a:p>
-          <a:p>
-            <a:pPr>
-              <a:buNone/>
-            </a:pPr>
-            <a:r>
-              <a:t>사진: Tamorlan, CC BY-SA 3.0 https://commons.wikimedia.org/wiki/File:Gallina_en_Pepitoria_(Ciriaco).JPG</a:t>
-            </a:r>
-          </a:p>
-          <a:p>
-            <a:pPr>
-              <a:buNone/>
-            </a:pPr>
-            <a:r>
-              <a:t>장소 데이터: OpenStreetMap 기여자 https://www.openstreetmap.org/copyright, Photon https://photon.komoot.io/, GeoNames https://www.geonames.org/</a:t>
-            </a:r>
-          </a:p>
-          <a:p>
-            <a:pPr>
-              <a:buNone/>
-            </a:pPr>
-            <a:r>
-              <a:t>영상은 실제 캡처의 편집본으로 처리 시간이나 클릭을 재현하지 않음.</a:t>
-            </a:r>
-          </a:p>
-        </p:txBody>
-      </p:sp>
-    </p:spTree>
-  </p:cSld>
-  <p:clrMapOvr>
-    <a:masterClrMapping/>
-  </p:clrMapOvr>
-</p:notes>
+<ns0:notes xmlns:ns0="http://schemas.openxmlformats.org/presentationml/2006/main" xmlns:ns1="http://schemas.openxmlformats.org/drawingml/2006/main" showMasterSp="1" showMasterPhAnim="1">
+  <ns0:cSld>
+    <ns0:spTree>
+      <ns0:nvGrpSpPr>
+        <ns0:cNvPr id="1" name=""/>
+        <ns0:cNvGrpSpPr/>
+        <ns0:nvPr/>
+      </ns0:nvGrpSpPr>
+      <ns0:grpSpPr>
+        <ns1:xfrm>
+          <ns1:off x="0" y="0"/>
+          <ns1:ext cx="0" cy="0"/>
+          <ns1:chOff x="0" y="0"/>
+          <ns1:chExt cx="0" cy="0"/>
+        </ns1:xfrm>
+      </ns0:grpSpPr>
+      <ns0:sp>
+        <ns0:nvSpPr>
+          <ns0:cNvPr id="143" name="Shape 143"/>
+          <ns0:cNvSpPr/>
+          <ns0:nvPr>
+            <ns0:ph type="sldImg"/>
+          </ns0:nvPr>
+        </ns0:nvSpPr>
+        <ns0:spPr>
+          <ns1:prstGeom prst="rect">
+            <ns1:avLst/>
+          </ns1:prstGeom>
+        </ns0:spPr>
+        <ns0:txBody>
+          <ns1:bodyPr/>
+          <ns1:lstStyle/>
+          <ns1:p>
+            <ns1:pPr/>
+          </ns1:p>
+        </ns0:txBody>
+      </ns0:sp>
+      <ns0:sp>
+        <ns0:nvSpPr>
+          <ns0:cNvPr id="144" name="Shape 144"/>
+          <ns0:cNvSpPr/>
+          <ns0:nvPr>
+            <ns0:ph type="body" sz="quarter" idx="1"/>
+          </ns0:nvPr>
+        </ns0:nvSpPr>
+        <ns0:spPr>
+          <ns1:prstGeom prst="rect">
+            <ns1:avLst/>
+          </ns1:prstGeom>
+        </ns0:spPr>
+        <ns0:txBody>
+          <ns1:bodyPr/>
+          <ns1:lstStyle/>
+          <ns1:p>
+            <ns1:pPr>
+              <ns1:buNone/>
+            </ns1:pPr>
+            <ns1:r>
+              <ns1:t/>
+            </ns1:r>
+          </ns1:p>
+          <ns1:p>
+            <ns1:pPr>
+              <ns1:buNone/>
+            </ns1:pPr>
+            <ns1:r>
+              <ns1:t/>
+            </ns1:r>
+          </ns1:p>
+          <ns1:p>
+            <ns1:pPr>
+              <ns1:buNone/>
+            </ns1:pPr>
+            <ns1:r>
+              <ns1:t/>
+            </ns1:r>
+          </ns1:p>
+          <ns1:p>
+            <ns1:pPr>
+              <ns1:buNone/>
+            </ns1:pPr>
+            <ns1:r>
+              <ns1:t/>
+            </ns1:r>
+          </ns1:p>
+          <ns1:p>
+            <ns1:pPr>
+              <ns1:buNone/>
+            </ns1:pPr>
+            <ns1:r>
+              <ns1:t/>
+            </ns1:r>
+          </ns1:p>
+          <ns1:p>
+            <ns1:pPr>
+              <ns1:buNone/>
+            </ns1:pPr>
+            <ns1:r>
+              <ns1:t/>
+            </ns1:r>
+          </ns1:p>
+          <ns1:p>
+            <ns1:pPr>
+              <ns1:buNone/>
+            </ns1:pPr>
+            <ns1:r>
+              <ns1:t/>
+            </ns1:r>
+          </ns1:p>
+          <ns1:p>
+            <ns1:pPr>
+              <ns1:buNone/>
+            </ns1:pPr>
+            <ns1:r>
+              <ns1:t/>
+            </ns1:r>
+          </ns1:p>
+          <ns1:p>
+            <ns1:pPr>
+              <ns1:buNone/>
+            </ns1:pPr>
+            <ns1:r>
+              <ns1:t/>
+            </ns1:r>
+          </ns1:p>
+          <ns1:p>
+            <ns1:pPr>
+              <ns1:buNone/>
+            </ns1:pPr>
+            <ns1:r>
+              <ns1:t/>
+            </ns1:r>
+          </ns1:p>
+          <ns1:p>
+            <ns1:pPr>
+              <ns1:buNone/>
+            </ns1:pPr>
+            <ns1:r>
+              <ns1:t/>
+            </ns1:r>
+          </ns1:p>
+          <ns1:p>
+            <ns1:pPr>
+              <ns1:buNone/>
+            </ns1:pPr>
+            <ns1:r>
+              <ns1:t/>
+            </ns1:r>
+          </ns1:p>
+          <ns1:p>
+            <ns1:pPr>
+              <ns1:buNone/>
+            </ns1:pPr>
+            <ns1:r>
+              <ns1:t/>
+            </ns1:r>
+          </ns1:p>
+          <ns1:p>
+            <ns1:pPr>
+              <ns1:buNone/>
+            </ns1:pPr>
+            <ns1:r>
+              <ns1:t/>
+            </ns1:r>
+          </ns1:p>
+          <ns1:p>
+            <ns1:pPr>
+              <ns1:buNone/>
+            </ns1:pPr>
+            <ns1:r>
+              <ns1:t/>
+            </ns1:r>
+          </ns1:p>
+          <ns1:p>
+            <ns1:pPr>
+              <ns1:buNone/>
+            </ns1:pPr>
+            <ns1:r>
+              <ns1:t/>
+            </ns1:r>
+          </ns1:p>
+          <ns1:p>
+            <ns1:pPr>
+              <ns1:buNone/>
+            </ns1:pPr>
+            <ns1:r>
+              <ns1:t/>
+            </ns1:r>
+          </ns1:p>
+          <ns1:p>
+            <ns1:pPr>
+              <ns1:buNone/>
+            </ns1:pPr>
+            <ns1:r>
+              <ns1:t/>
+            </ns1:r>
+          </ns1:p>
+          <ns1:p>
+            <ns1:pPr>
+              <ns1:buNone/>
+            </ns1:pPr>
+            <ns1:r>
+              <ns1:t/>
+            </ns1:r>
+          </ns1:p>
+          <ns1:p>
+            <ns1:pPr>
+              <ns1:buNone/>
+            </ns1:pPr>
+            <ns1:r>
+              <ns1:t/>
+            </ns1:r>
+          </ns1:p>
+          <ns1:p>
+            <ns1:pPr>
+              <ns1:buNone/>
+            </ns1:pPr>
+            <ns1:r>
+              <ns1:t/>
+            </ns1:r>
+          </ns1:p>
+        </ns0:txBody>
+      </ns0:sp>
+    </ns0:spTree>
+  </ns0:cSld>
+  <ns0:clrMapOvr>
+    <ns1:masterClrMapping/>
+  </ns0:clrMapOvr>
+</ns0:notes>
 </file>
 
 <file path=ppt/notesSlides/notesSlide8.xml><?xml version="1.0" encoding="utf-8"?>
-<p:notes xmlns:a="http://schemas.openxmlformats.org/drawingml/2006/main" xmlns:r="http://schemas.openxmlformats.org/officeDocument/2006/relationships" xmlns:p="http://schemas.openxmlformats.org/presentationml/2006/main" xmlns:m="http://schemas.openxmlformats.org/officeDocument/2006/math" xmlns:a14="http://schemas.microsoft.com/office/drawing/2010/main" showMasterSp="1" showMasterPhAnim="1">
-  <p:cSld>
-    <p:spTree>
-      <p:nvGrpSpPr>
-        <p:cNvPr id="1" name=""/>
-        <p:cNvGrpSpPr/>
-        <p:nvPr/>
-      </p:nvGrpSpPr>
-      <p:grpSpPr>
-        <a:xfrm>
-          <a:off x="0" y="0"/>
-          <a:ext cx="0" cy="0"/>
-          <a:chOff x="0" y="0"/>
-          <a:chExt cx="0" cy="0"/>
-        </a:xfrm>
-      </p:grpSpPr>
-      <p:sp>
-        <p:nvSpPr>
-          <p:cNvPr id="158" name="Shape 158"/>
-          <p:cNvSpPr/>
-          <p:nvPr>
-            <p:ph type="sldImg"/>
-          </p:nvPr>
-        </p:nvSpPr>
-        <p:spPr>
-          <a:prstGeom prst="rect">
-            <a:avLst/>
-          </a:prstGeom>
-        </p:spPr>
-        <p:txBody>
-          <a:bodyPr/>
-          <a:lstStyle/>
-          <a:p>
-            <a:pPr/>
-          </a:p>
-        </p:txBody>
-      </p:sp>
-      <p:sp>
-        <p:nvSpPr>
-          <p:cNvPr id="159" name="Shape 159"/>
-          <p:cNvSpPr/>
-          <p:nvPr>
-            <p:ph type="body" sz="quarter" idx="1"/>
-          </p:nvPr>
-        </p:nvSpPr>
-        <p:spPr>
-          <a:prstGeom prst="rect">
-            <a:avLst/>
-          </a:prstGeom>
-        </p:spPr>
-        <p:txBody>
-          <a:bodyPr/>
-          <a:lstStyle/>
-          <a:p>
-            <a:pPr>
-              <a:buNone/>
-            </a:pPr>
-            <a:r>
-              <a:t>[목표 50초]</a:t>
-            </a:r>
-          </a:p>
-          <a:p>
-            <a:pPr>
-              <a:buNone/>
-            </a:pPr>
-            <a:r>
-              <a:t/>
-            </a:r>
-          </a:p>
-          <a:p>
-            <a:pPr>
-              <a:buNone/>
-            </a:pPr>
-            <a:r>
-              <a:t>고른 장소는 실제로 갈 수 있는 일정으로 이어져야 합니다. 그래서 이미 확정된 예약을 먼저 두고, 남은 시간에 다른 장소를 넣을 수 있는지 계산하게 했습니다.</a:t>
-            </a:r>
-          </a:p>
-          <a:p>
-            <a:pPr>
-              <a:buNone/>
-            </a:pPr>
-            <a:r>
-              <a:t/>
-            </a:r>
-          </a:p>
-          <a:p>
-            <a:pPr>
-              <a:buNone/>
-            </a:pPr>
-            <a:r>
-              <a:t>점심이 한 시에 끝나고 다음 예약이 세 시라면 빈 시간은 두 시간입니다. 여기에 90분 머무는 장소를 넣고 앞뒤 이동에 각각 30분이 걸리면 총 150분이 필요합니다. 머무는 시간만 보면 들어갈 것 같지만 실제로는 30분이 부족한 겁니다.</a:t>
-            </a:r>
-          </a:p>
-          <a:p>
-            <a:pPr>
-              <a:buNone/>
-            </a:pPr>
-            <a:r>
-              <a:t/>
-            </a:r>
-          </a:p>
-          <a:p>
-            <a:pPr>
-              <a:buNone/>
-            </a:pPr>
-            <a:r>
-              <a:t>일정을 편집할 때도 바로 원본을 바꾸지 않고 먼저 영향을 미리 보여줍니다. 확인한 뒤 적용하고, 다시 되돌릴 수 있습니다. 이동시간이나 영업시간을 모르면 확인이 필요하다고 남기고, 확정 예약을 임의로 옮겨서 일정을 맞추지 않도록 했습니다.</a:t>
-            </a:r>
-          </a:p>
-          <a:p>
-            <a:pPr>
-              <a:buNone/>
-            </a:pPr>
-            <a:r>
-              <a:t/>
-            </a:r>
-          </a:p>
-          <a:p>
-            <a:pPr>
-              <a:buNone/>
-            </a:pPr>
-            <a:r>
-              <a:t>화면 안내: 두 시간의 빈칸과 필요한 150분을 비교하고 미리보기 흐름을 설명합니다.</a:t>
-            </a:r>
-          </a:p>
-          <a:p>
-            <a:pPr>
-              <a:buNone/>
-            </a:pPr>
-            <a:r>
-              <a:t/>
-            </a:r>
-          </a:p>
-          <a:p>
-            <a:pPr>
-              <a:buNone/>
-            </a:pPr>
-            <a:r>
-              <a:t>[자료 출처 / 낭독하지 않음]</a:t>
-            </a:r>
-          </a:p>
-          <a:p>
-            <a:pPr>
-              <a:buNone/>
-            </a:pPr>
-            <a:r>
-              <a:t>https://github.com/Jin-s-work/Travel-Agent</a:t>
-            </a:r>
-          </a:p>
-          <a:p>
-            <a:pPr>
-              <a:buNone/>
-            </a:pPr>
-            <a:r>
-              <a:t>최신 화면: docs/screenshots/*-v7.jpg, 2026-10-08 운영 서비스의 가상 도쿄 여행</a:t>
-            </a:r>
-          </a:p>
-          <a:p>
-            <a:pPr>
-              <a:buNone/>
-            </a:pPr>
-            <a:r>
-              <a:t>이전 메일·일정·사진 예시: docs/presentation/CREDITS.md, 2026-10-07 로컬 합성 화면</a:t>
-            </a:r>
-          </a:p>
-          <a:p>
-            <a:pPr>
-              <a:buNone/>
-            </a:pPr>
-            <a:r>
-              <a:t>추천 v5: docs/service-v3/MAIN_RECOMMENDATION_UX.md 및 src/recommendations/hybrid_v5.py</a:t>
-            </a:r>
-          </a:p>
-          <a:p>
-            <a:pPr>
-              <a:buNone/>
-            </a:pPr>
-            <a:r>
-              <a:t>기존 v4 합성 평가: docs/service-v4/reports/hybrid-v4-benchmark.md. v5 결과가 아님.</a:t>
-            </a:r>
-          </a:p>
-          <a:p>
-            <a:pPr>
-              <a:buNone/>
-            </a:pPr>
-            <a:r>
-              <a:t>엄격 현지어 리뷰 추천 OFF. 실제 사용자 만족도 미측정. 100개 도시 입력과 자료 수준은 다름.</a:t>
-            </a:r>
-          </a:p>
-          <a:p>
-            <a:pPr>
-              <a:buNone/>
-            </a:pPr>
-            <a:r>
-              <a:t>사진: Javier Lastras, CC BY 2.0 https://commons.wikimedia.org/wiki/File:Barra_de_Casa_Lucio_(4245090907).jpg</a:t>
-            </a:r>
-          </a:p>
-          <a:p>
-            <a:pPr>
-              <a:buNone/>
-            </a:pPr>
-            <a:r>
-              <a:t>사진: Tamorlan, CC BY-SA 3.0 https://commons.wikimedia.org/wiki/File:Gallina_en_Pepitoria_(Ciriaco).JPG</a:t>
-            </a:r>
-          </a:p>
-          <a:p>
-            <a:pPr>
-              <a:buNone/>
-            </a:pPr>
-            <a:r>
-              <a:t>장소 데이터: OpenStreetMap 기여자 https://www.openstreetmap.org/copyright, Photon https://photon.komoot.io/, GeoNames https://www.geonames.org/</a:t>
-            </a:r>
-          </a:p>
-          <a:p>
-            <a:pPr>
-              <a:buNone/>
-            </a:pPr>
-            <a:r>
-              <a:t>영상은 실제 캡처의 편집본으로 처리 시간이나 클릭을 재현하지 않음.</a:t>
-            </a:r>
-          </a:p>
-        </p:txBody>
-      </p:sp>
-    </p:spTree>
-  </p:cSld>
-  <p:clrMapOvr>
-    <a:masterClrMapping/>
-  </p:clrMapOvr>
-</p:notes>
+<ns0:notes xmlns:ns0="http://schemas.openxmlformats.org/presentationml/2006/main" xmlns:ns1="http://schemas.openxmlformats.org/drawingml/2006/main" showMasterSp="1" showMasterPhAnim="1">
+  <ns0:cSld>
+    <ns0:spTree>
+      <ns0:nvGrpSpPr>
+        <ns0:cNvPr id="1" name=""/>
+        <ns0:cNvGrpSpPr/>
+        <ns0:nvPr/>
+      </ns0:nvGrpSpPr>
+      <ns0:grpSpPr>
+        <ns1:xfrm>
+          <ns1:off x="0" y="0"/>
+          <ns1:ext cx="0" cy="0"/>
+          <ns1:chOff x="0" y="0"/>
+          <ns1:chExt cx="0" cy="0"/>
+        </ns1:xfrm>
+      </ns0:grpSpPr>
+      <ns0:sp>
+        <ns0:nvSpPr>
+          <ns0:cNvPr id="158" name="Shape 158"/>
+          <ns0:cNvSpPr/>
+          <ns0:nvPr>
+            <ns0:ph type="sldImg"/>
+          </ns0:nvPr>
+        </ns0:nvSpPr>
+        <ns0:spPr>
+          <ns1:prstGeom prst="rect">
+            <ns1:avLst/>
+          </ns1:prstGeom>
+        </ns0:spPr>
+        <ns0:txBody>
+          <ns1:bodyPr/>
+          <ns1:lstStyle/>
+          <ns1:p>
+            <ns1:pPr/>
+          </ns1:p>
+        </ns0:txBody>
+      </ns0:sp>
+      <ns0:sp>
+        <ns0:nvSpPr>
+          <ns0:cNvPr id="159" name="Shape 159"/>
+          <ns0:cNvSpPr/>
+          <ns0:nvPr>
+            <ns0:ph type="body" sz="quarter" idx="1"/>
+          </ns0:nvPr>
+        </ns0:nvSpPr>
+        <ns0:spPr>
+          <ns1:prstGeom prst="rect">
+            <ns1:avLst/>
+          </ns1:prstGeom>
+        </ns0:spPr>
+        <ns0:txBody>
+          <ns1:bodyPr/>
+          <ns1:lstStyle/>
+          <ns1:p>
+            <ns1:pPr>
+              <ns1:buNone/>
+            </ns1:pPr>
+            <ns1:r>
+              <ns1:t/>
+            </ns1:r>
+          </ns1:p>
+          <ns1:p>
+            <ns1:pPr>
+              <ns1:buNone/>
+            </ns1:pPr>
+            <ns1:r>
+              <ns1:t/>
+            </ns1:r>
+          </ns1:p>
+          <ns1:p>
+            <ns1:pPr>
+              <ns1:buNone/>
+            </ns1:pPr>
+            <ns1:r>
+              <ns1:t/>
+            </ns1:r>
+          </ns1:p>
+          <ns1:p>
+            <ns1:pPr>
+              <ns1:buNone/>
+            </ns1:pPr>
+            <ns1:r>
+              <ns1:t/>
+            </ns1:r>
+          </ns1:p>
+          <ns1:p>
+            <ns1:pPr>
+              <ns1:buNone/>
+            </ns1:pPr>
+            <ns1:r>
+              <ns1:t/>
+            </ns1:r>
+          </ns1:p>
+          <ns1:p>
+            <ns1:pPr>
+              <ns1:buNone/>
+            </ns1:pPr>
+            <ns1:r>
+              <ns1:t/>
+            </ns1:r>
+          </ns1:p>
+          <ns1:p>
+            <ns1:pPr>
+              <ns1:buNone/>
+            </ns1:pPr>
+            <ns1:r>
+              <ns1:t/>
+            </ns1:r>
+          </ns1:p>
+          <ns1:p>
+            <ns1:pPr>
+              <ns1:buNone/>
+            </ns1:pPr>
+            <ns1:r>
+              <ns1:t/>
+            </ns1:r>
+          </ns1:p>
+          <ns1:p>
+            <ns1:pPr>
+              <ns1:buNone/>
+            </ns1:pPr>
+            <ns1:r>
+              <ns1:t/>
+            </ns1:r>
+          </ns1:p>
+          <ns1:p>
+            <ns1:pPr>
+              <ns1:buNone/>
+            </ns1:pPr>
+            <ns1:r>
+              <ns1:t/>
+            </ns1:r>
+          </ns1:p>
+          <ns1:p>
+            <ns1:pPr>
+              <ns1:buNone/>
+            </ns1:pPr>
+            <ns1:r>
+              <ns1:t/>
+            </ns1:r>
+          </ns1:p>
+          <ns1:p>
+            <ns1:pPr>
+              <ns1:buNone/>
+            </ns1:pPr>
+            <ns1:r>
+              <ns1:t/>
+            </ns1:r>
+          </ns1:p>
+          <ns1:p>
+            <ns1:pPr>
+              <ns1:buNone/>
+            </ns1:pPr>
+            <ns1:r>
+              <ns1:t/>
+            </ns1:r>
+          </ns1:p>
+          <ns1:p>
+            <ns1:pPr>
+              <ns1:buNone/>
+            </ns1:pPr>
+            <ns1:r>
+              <ns1:t/>
+            </ns1:r>
+          </ns1:p>
+          <ns1:p>
+            <ns1:pPr>
+              <ns1:buNone/>
+            </ns1:pPr>
+            <ns1:r>
+              <ns1:t/>
+            </ns1:r>
+          </ns1:p>
+          <ns1:p>
+            <ns1:pPr>
+              <ns1:buNone/>
+            </ns1:pPr>
+            <ns1:r>
+              <ns1:t/>
+            </ns1:r>
+          </ns1:p>
+          <ns1:p>
+            <ns1:pPr>
+              <ns1:buNone/>
+            </ns1:pPr>
+            <ns1:r>
+              <ns1:t/>
+            </ns1:r>
+          </ns1:p>
+          <ns1:p>
+            <ns1:pPr>
+              <ns1:buNone/>
+            </ns1:pPr>
+            <ns1:r>
+              <ns1:t/>
+            </ns1:r>
+          </ns1:p>
+          <ns1:p>
+            <ns1:pPr>
+              <ns1:buNone/>
+            </ns1:pPr>
+            <ns1:r>
+              <ns1:t/>
+            </ns1:r>
+          </ns1:p>
+          <ns1:p>
+            <ns1:pPr>
+              <ns1:buNone/>
+            </ns1:pPr>
+            <ns1:r>
+              <ns1:t/>
+            </ns1:r>
+          </ns1:p>
+          <ns1:p>
+            <ns1:pPr>
+              <ns1:buNone/>
+            </ns1:pPr>
+            <ns1:r>
+              <ns1:t/>
+            </ns1:r>
+          </ns1:p>
+        </ns0:txBody>
+      </ns0:sp>
+    </ns0:spTree>
+  </ns0:cSld>
+  <ns0:clrMapOvr>
+    <ns1:masterClrMapping/>
+  </ns0:clrMapOvr>
+</ns0:notes>
 </file>
 
 <file path=ppt/notesSlides/notesSlide9.xml><?xml version="1.0" encoding="utf-8"?>
-<p:notes xmlns:a="http://schemas.openxmlformats.org/drawingml/2006/main" xmlns:r="http://schemas.openxmlformats.org/officeDocument/2006/relationships" xmlns:p="http://schemas.openxmlformats.org/presentationml/2006/main" xmlns:m="http://schemas.openxmlformats.org/officeDocument/2006/math" xmlns:a14="http://schemas.microsoft.com/office/drawing/2010/main" showMasterSp="1" showMasterPhAnim="1">
-  <p:cSld>
-    <p:spTree>
-      <p:nvGrpSpPr>
-        <p:cNvPr id="1" name=""/>
-        <p:cNvGrpSpPr/>
-        <p:nvPr/>
-      </p:nvGrpSpPr>
-      <p:grpSpPr>
-        <a:xfrm>
-          <a:off x="0" y="0"/>
-          <a:ext cx="0" cy="0"/>
-          <a:chOff x="0" y="0"/>
-          <a:chExt cx="0" cy="0"/>
-        </a:xfrm>
-      </p:grpSpPr>
-      <p:sp>
-        <p:nvSpPr>
-          <p:cNvPr id="172" name="Shape 172"/>
-          <p:cNvSpPr/>
-          <p:nvPr>
-            <p:ph type="sldImg"/>
-          </p:nvPr>
-        </p:nvSpPr>
-        <p:spPr>
-          <a:prstGeom prst="rect">
-            <a:avLst/>
-          </a:prstGeom>
-        </p:spPr>
-        <p:txBody>
-          <a:bodyPr/>
-          <a:lstStyle/>
-          <a:p>
-            <a:pPr/>
-          </a:p>
-        </p:txBody>
-      </p:sp>
-      <p:sp>
-        <p:nvSpPr>
-          <p:cNvPr id="173" name="Shape 173"/>
-          <p:cNvSpPr/>
-          <p:nvPr>
-            <p:ph type="body" sz="quarter" idx="1"/>
-          </p:nvPr>
-        </p:nvSpPr>
-        <p:spPr>
-          <a:prstGeom prst="rect">
-            <a:avLst/>
-          </a:prstGeom>
-        </p:spPr>
-        <p:txBody>
-          <a:bodyPr/>
-          <a:lstStyle/>
-          <a:p>
-            <a:pPr>
-              <a:buNone/>
-            </a:pPr>
-            <a:r>
-              <a:t>[목표 55초]</a:t>
-            </a:r>
-          </a:p>
-          <a:p>
-            <a:pPr>
-              <a:buNone/>
-            </a:pPr>
-            <a:r>
-              <a:t/>
-            </a:r>
-          </a:p>
-          <a:p>
-            <a:pPr>
-              <a:buNone/>
-            </a:pPr>
-            <a:r>
-              <a:t>처음에는 메일을 읽고 질문에 답하는 기능으로 시작했습니다. 그다음 사용자별 여행 저장, 장소 추천, 일정 편집을 차례로 연결했습니다.</a:t>
-            </a:r>
-          </a:p>
-          <a:p>
-            <a:pPr>
-              <a:buNone/>
-            </a:pPr>
-            <a:r>
-              <a:t/>
-            </a:r>
-          </a:p>
-          <a:p>
-            <a:pPr>
-              <a:buNone/>
-            </a:pPr>
-            <a:r>
-              <a:t>화면은 웹으로 만들고 FastAPI 서버가 요청을 처리합니다. Render에 배포하고 여행 데이터와 비공개 파일은 Supabase에 보관합니다. 오래 걸리는 작업은 상태를 저장해서 새로고침한 뒤에도 확인하게 했습니다.</a:t>
-            </a:r>
-          </a:p>
-          <a:p>
-            <a:pPr>
-              <a:buNone/>
-            </a:pPr>
-            <a:r>
-              <a:t/>
-            </a:r>
-          </a:p>
-          <a:p>
-            <a:pPr>
-              <a:buNone/>
-            </a:pPr>
-            <a:r>
-              <a:t>메일에서 정보를 읽는 데는 gpt-5-mini를, 본문 검색에는 text-embedding-3-small을 사용합니다. 날짜 조회와 일정의 시간 충돌은 서버 코드로 검사합니다.</a:t>
-            </a:r>
-          </a:p>
-          <a:p>
-            <a:pPr>
-              <a:buNone/>
-            </a:pPr>
-            <a:r>
-              <a:t/>
-            </a:r>
-          </a:p>
-          <a:p>
-            <a:pPr>
-              <a:buNone/>
-            </a:pPr>
-            <a:r>
-              <a:t>현재 추천 모델은 hybrid_v5입니다. 취향 태그의 유사도, 평가 수를 고려한 평점, 거리 등을 계산합니다. 이번에는 여러 언어의 음식 이름을 더 연결하고 공개 음식 종류와 도심 거리도 반영했습니다. 사용자 행동을 학습한 모델은 아직 아니고, 실제 여행에서 추천이 얼마나 유용한지는 별도로 평가할 계획입니다.</a:t>
-            </a:r>
-          </a:p>
-          <a:p>
-            <a:pPr>
-              <a:buNone/>
-            </a:pPr>
-            <a:r>
-              <a:t/>
-            </a:r>
-          </a:p>
-          <a:p>
-            <a:pPr>
-              <a:buNone/>
-            </a:pPr>
-            <a:r>
-              <a:t>화면 안내: 각 기술 이름보다 맡긴 역할을 중심으로 설명합니다.</a:t>
-            </a:r>
-          </a:p>
-          <a:p>
-            <a:pPr>
-              <a:buNone/>
-            </a:pPr>
-            <a:r>
-              <a:t/>
-            </a:r>
-          </a:p>
-          <a:p>
-            <a:pPr>
-              <a:buNone/>
-            </a:pPr>
-            <a:r>
-              <a:t>[자료 출처 / 낭독하지 않음]</a:t>
-            </a:r>
-          </a:p>
-          <a:p>
-            <a:pPr>
-              <a:buNone/>
-            </a:pPr>
-            <a:r>
-              <a:t>https://github.com/Jin-s-work/Travel-Agent</a:t>
-            </a:r>
-          </a:p>
-          <a:p>
-            <a:pPr>
-              <a:buNone/>
-            </a:pPr>
-            <a:r>
-              <a:t>최신 화면: docs/screenshots/*-v7.jpg, 2026-10-08 운영 서비스의 가상 도쿄 여행</a:t>
-            </a:r>
-          </a:p>
-          <a:p>
-            <a:pPr>
-              <a:buNone/>
-            </a:pPr>
-            <a:r>
-              <a:t>이전 메일·일정·사진 예시: docs/presentation/CREDITS.md, 2026-10-07 로컬 합성 화면</a:t>
-            </a:r>
-          </a:p>
-          <a:p>
-            <a:pPr>
-              <a:buNone/>
-            </a:pPr>
-            <a:r>
-              <a:t>추천 v5: docs/service-v3/MAIN_RECOMMENDATION_UX.md 및 src/recommendations/hybrid_v5.py</a:t>
-            </a:r>
-          </a:p>
-          <a:p>
-            <a:pPr>
-              <a:buNone/>
-            </a:pPr>
-            <a:r>
-              <a:t>기존 v4 합성 평가: docs/service-v4/reports/hybrid-v4-benchmark.md. v5 결과가 아님.</a:t>
-            </a:r>
-          </a:p>
-          <a:p>
-            <a:pPr>
-              <a:buNone/>
-            </a:pPr>
-            <a:r>
-              <a:t>엄격 현지어 리뷰 추천 OFF. 실제 사용자 만족도 미측정. 100개 도시 입력과 자료 수준은 다름.</a:t>
-            </a:r>
-          </a:p>
-          <a:p>
-            <a:pPr>
-              <a:buNone/>
-            </a:pPr>
-            <a:r>
-              <a:t>사진: Javier Lastras, CC BY 2.0 https://commons.wikimedia.org/wiki/File:Barra_de_Casa_Lucio_(4245090907).jpg</a:t>
-            </a:r>
-          </a:p>
-          <a:p>
-            <a:pPr>
-              <a:buNone/>
-            </a:pPr>
-            <a:r>
-              <a:t>사진: Tamorlan, CC BY-SA 3.0 https://commons.wikimedia.org/wiki/File:Gallina_en_Pepitoria_(Ciriaco).JPG</a:t>
-            </a:r>
-          </a:p>
-          <a:p>
-            <a:pPr>
-              <a:buNone/>
-            </a:pPr>
-            <a:r>
-              <a:t>장소 데이터: OpenStreetMap 기여자 https://www.openstreetmap.org/copyright, Photon https://photon.komoot.io/, GeoNames https://www.geonames.org/</a:t>
-            </a:r>
-          </a:p>
-          <a:p>
-            <a:pPr>
-              <a:buNone/>
-            </a:pPr>
-            <a:r>
-              <a:t>영상은 실제 캡처의 편집본으로 처리 시간이나 클릭을 재현하지 않음.</a:t>
-            </a:r>
-          </a:p>
-        </p:txBody>
-      </p:sp>
-    </p:spTree>
-  </p:cSld>
-  <p:clrMapOvr>
-    <a:masterClrMapping/>
-  </p:clrMapOvr>
-</p:notes>
+<ns0:notes xmlns:ns0="http://schemas.openxmlformats.org/presentationml/2006/main" xmlns:ns1="http://schemas.openxmlformats.org/drawingml/2006/main" showMasterSp="1" showMasterPhAnim="1">
+  <ns0:cSld>
+    <ns0:spTree>
+      <ns0:nvGrpSpPr>
+        <ns0:cNvPr id="1" name=""/>
+        <ns0:cNvGrpSpPr/>
+        <ns0:nvPr/>
+      </ns0:nvGrpSpPr>
+      <ns0:grpSpPr>
+        <ns1:xfrm>
+          <ns1:off x="0" y="0"/>
+          <ns1:ext cx="0" cy="0"/>
+          <ns1:chOff x="0" y="0"/>
+          <ns1:chExt cx="0" cy="0"/>
+        </ns1:xfrm>
+      </ns0:grpSpPr>
+      <ns0:sp>
+        <ns0:nvSpPr>
+          <ns0:cNvPr id="172" name="Shape 172"/>
+          <ns0:cNvSpPr/>
+          <ns0:nvPr>
+            <ns0:ph type="sldImg"/>
+          </ns0:nvPr>
+        </ns0:nvSpPr>
+        <ns0:spPr>
+          <ns1:prstGeom prst="rect">
+            <ns1:avLst/>
+          </ns1:prstGeom>
+        </ns0:spPr>
+        <ns0:txBody>
+          <ns1:bodyPr/>
+          <ns1:lstStyle/>
+          <ns1:p>
+            <ns1:pPr/>
+          </ns1:p>
+        </ns0:txBody>
+      </ns0:sp>
+      <ns0:sp>
+        <ns0:nvSpPr>
+          <ns0:cNvPr id="173" name="Shape 173"/>
+          <ns0:cNvSpPr/>
+          <ns0:nvPr>
+            <ns0:ph type="body" sz="quarter" idx="1"/>
+          </ns0:nvPr>
+        </ns0:nvSpPr>
+        <ns0:spPr>
+          <ns1:prstGeom prst="rect">
+            <ns1:avLst/>
+          </ns1:prstGeom>
+        </ns0:spPr>
+        <ns0:txBody>
+          <ns1:bodyPr/>
+          <ns1:lstStyle/>
+          <ns1:p>
+            <ns1:pPr>
+              <ns1:buNone/>
+            </ns1:pPr>
+            <ns1:r>
+              <ns1:t/>
+            </ns1:r>
+          </ns1:p>
+          <ns1:p>
+            <ns1:pPr>
+              <ns1:buNone/>
+            </ns1:pPr>
+            <ns1:r>
+              <ns1:t/>
+            </ns1:r>
+          </ns1:p>
+          <ns1:p>
+            <ns1:pPr>
+              <ns1:buNone/>
+            </ns1:pPr>
+            <ns1:r>
+              <ns1:t/>
+            </ns1:r>
+          </ns1:p>
+          <ns1:p>
+            <ns1:pPr>
+              <ns1:buNone/>
+            </ns1:pPr>
+            <ns1:r>
+              <ns1:t/>
+            </ns1:r>
+          </ns1:p>
+          <ns1:p>
+            <ns1:pPr>
+              <ns1:buNone/>
+            </ns1:pPr>
+            <ns1:r>
+              <ns1:t/>
+            </ns1:r>
+          </ns1:p>
+          <ns1:p>
+            <ns1:pPr>
+              <ns1:buNone/>
+            </ns1:pPr>
+            <ns1:r>
+              <ns1:t/>
+            </ns1:r>
+          </ns1:p>
+          <ns1:p>
+            <ns1:pPr>
+              <ns1:buNone/>
+            </ns1:pPr>
+            <ns1:r>
+              <ns1:t/>
+            </ns1:r>
+          </ns1:p>
+          <ns1:p>
+            <ns1:pPr>
+              <ns1:buNone/>
+            </ns1:pPr>
+            <ns1:r>
+              <ns1:t/>
+            </ns1:r>
+          </ns1:p>
+          <ns1:p>
+            <ns1:pPr>
+              <ns1:buNone/>
+            </ns1:pPr>
+            <ns1:r>
+              <ns1:t/>
+            </ns1:r>
+          </ns1:p>
+          <ns1:p>
+            <ns1:pPr>
+              <ns1:buNone/>
+            </ns1:pPr>
+            <ns1:r>
+              <ns1:t/>
+            </ns1:r>
+          </ns1:p>
+          <ns1:p>
+            <ns1:pPr>
+              <ns1:buNone/>
+            </ns1:pPr>
+            <ns1:r>
+              <ns1:t/>
+            </ns1:r>
+          </ns1:p>
+          <ns1:p>
+            <ns1:pPr>
+              <ns1:buNone/>
+            </ns1:pPr>
+            <ns1:r>
+              <ns1:t/>
+            </ns1:r>
+          </ns1:p>
+          <ns1:p>
+            <ns1:pPr>
+              <ns1:buNone/>
+            </ns1:pPr>
+            <ns1:r>
+              <ns1:t/>
+            </ns1:r>
+          </ns1:p>
+          <ns1:p>
+            <ns1:pPr>
+              <ns1:buNone/>
+            </ns1:pPr>
+            <ns1:r>
+              <ns1:t/>
+            </ns1:r>
+          </ns1:p>
+          <ns1:p>
+            <ns1:pPr>
+              <ns1:buNone/>
+            </ns1:pPr>
+            <ns1:r>
+              <ns1:t/>
+            </ns1:r>
+          </ns1:p>
+          <ns1:p>
+            <ns1:pPr>
+              <ns1:buNone/>
+            </ns1:pPr>
+            <ns1:r>
+              <ns1:t/>
+            </ns1:r>
+          </ns1:p>
+          <ns1:p>
+            <ns1:pPr>
+              <ns1:buNone/>
+            </ns1:pPr>
+            <ns1:r>
+              <ns1:t/>
+            </ns1:r>
+          </ns1:p>
+          <ns1:p>
+            <ns1:pPr>
+              <ns1:buNone/>
+            </ns1:pPr>
+            <ns1:r>
+              <ns1:t/>
+            </ns1:r>
+          </ns1:p>
+          <ns1:p>
+            <ns1:pPr>
+              <ns1:buNone/>
+            </ns1:pPr>
+            <ns1:r>
+              <ns1:t/>
+            </ns1:r>
+          </ns1:p>
+          <ns1:p>
+            <ns1:pPr>
+              <ns1:buNone/>
+            </ns1:pPr>
+            <ns1:r>
+              <ns1:t/>
+            </ns1:r>
+          </ns1:p>
+          <ns1:p>
+            <ns1:pPr>
+              <ns1:buNone/>
+            </ns1:pPr>
+            <ns1:r>
+              <ns1:t/>
+            </ns1:r>
+          </ns1:p>
+          <ns1:p>
+            <ns1:pPr>
+              <ns1:buNone/>
+            </ns1:pPr>
+            <ns1:r>
+              <ns1:t/>
+            </ns1:r>
+          </ns1:p>
+          <ns1:p>
+            <ns1:pPr>
+              <ns1:buNone/>
+            </ns1:pPr>
+            <ns1:r>
+              <ns1:t/>
+            </ns1:r>
+          </ns1:p>
+        </ns0:txBody>
+      </ns0:sp>
+    </ns0:spTree>
+  </ns0:cSld>
+  <ns0:clrMapOvr>
+    <ns1:masterClrMapping/>
+  </ns0:clrMapOvr>
+</ns0:notes>
 </file>
 
 <file path=ppt/slideLayouts/slideLayout1.xml><?xml version="1.0" encoding="utf-8"?>
